--- a/docs/Ryse Presentation v6.pptx
+++ b/docs/Ryse Presentation v6.pptx
@@ -930,7 +930,7 @@
           <a:lstStyle/>
           <a:p>
             <a:r>
-              <a:t>Two columns because the holdings file counts lines and we count securities, and they differ — a bond held by two managers appears on two lines. Lines reconcile against that sheet exactly, at 2,366. If anyone asks about the last three rows: the futures and options are counted as work still to do, not as work written off — they are not bonds and they would need machinery we have not designed, but they are sixteen securities and nobody should leave thinking we have excluded them. The last row is a single fund holding, which a bond model cannot price at all. The bar on the previous slide groups all three into "not yet built", which is the same statement said more coarsely.</a:t>
+              <a:t>Two columns because the holdings file counts lines and we count securities, and they differ — a bond held by two managers appears on two lines. Lines reconcile against that sheet exactly, at 2,366. If anyone asks about the last three rows: the futures and options are counted as work still to do, not as work written off — they are not bonds and they would need machinery we have not designed, but they are sixteen securities and nobody should leave thinking we have excluded them. The last row is a fund holding rather than a bond — it carries no ISIN, no maturity and no rating, and it was bought at exactly $10.00 a unit and is marked at $9.23, so there is nothing for a bond model to price. The bar on the previous slide groups all three rows into "not yet built", which is the same statement said more coarsely.</a:t>
             </a:r>
           </a:p>
         </p:txBody>
@@ -1070,7 +1070,7 @@
           <a:lstStyle/>
           <a:p>
             <a:r>
-              <a:t>Be straight that the pooled classes are genuine remaining engineering, not a data problem. What makes them tractable is that the hard parts — the cash-flow machinery, the option model, the market-data plumbing — are built and proven on the 766 we already price. On the cloud step: today each of us runs the code in our own Azure terminal, which was the point of the September trial. Hosting it so Excel or another system can call it over the network is separate, known work — we put it to Mario in that report as an explicit question and it is still open.</a:t>
+              <a:t>Be straight that the pooled classes are genuine remaining engineering, not a data problem. What makes them tractable is that the hard parts — the cash-flow machinery, the option model, the market-data plumbing — are built and proven on the 766 we already price. On the cloud step: today each of us runs the code in our own Azure terminal, which was the point of the September trial. Hosting it so Excel or another system can call it over the network is separate, known work — we put it to Mario in that report as an explicit question and it is still open. ⚠️ If anyone joins the previous slide to this one and asks why futures and options are not on it: because "scoped" on that table is a status, not a queue position. They are sixteen securities out of 2,260, they are the only remaining rows that would need machinery we have not designed, and they sit behind everything on this slide. Say that rather than improvising a date.</a:t>
             </a:r>
           </a:p>
         </p:txBody>

--- a/docs/Ryse Presentation v6.pptx
+++ b/docs/Ryse Presentation v6.pptx
@@ -930,7 +930,7 @@
           <a:lstStyle/>
           <a:p>
             <a:r>
-              <a:t>Two columns because the holdings file counts lines and we count securities, and they differ — a bond held by two managers appears on two lines. Lines reconcile against that sheet exactly, at 2,366. If anyone asks about the last three rows: the futures and options are counted as work still to do, not as work written off — they are not bonds and they would need machinery we have not designed, but they are sixteen securities and nobody should leave thinking we have excluded them. The last row is a fund holding rather than a bond — it carries no ISIN, no maturity and no rating, and it was bought at exactly $10.00 a unit and is marked at $9.23, so there is nothing for a bond model to price. The bar on the previous slide groups all three rows into "not yet built", which is the same statement said more coarsely.</a:t>
+              <a:t>Two columns because the holdings file counts lines and we count securities, and they differ — a bond held by two managers appears on two lines. Lines reconcile against that sheet exactly, at 2,366. If anyone asks about the last three rows: the futures and options are counted as work still to do, not as work written off — they are not bonds and they would need machinery we have not designed, but they are sixteen securities and nobody should leave thinking we have excluded them. The last row is a fund holding rather than a bond — no ISIN, no maturity and no rating — so there is nothing in it for a bond model to price. The bar on the previous slide groups all three rows into "not yet built", which is the same statement said more coarsely.</a:t>
             </a:r>
           </a:p>
         </p:txBody>

--- a/docs/Ryse Presentation v6.pptx
+++ b/docs/Ryse Presentation v6.pptx
@@ -14,6 +14,7 @@
     <p:sldId id="262" r:id="rId14"/>
     <p:sldId id="263" r:id="rId15"/>
     <p:sldId id="264" r:id="rId16"/>
+    <p:sldId id="265" r:id="rId17"/>
   </p:sldIdLst>
   <p:sldSz cx="9144000" cy="5143500" type="screen4x3"/>
   <p:notesSz cx="6858000" cy="9144000"/>
@@ -511,6 +512,76 @@
           <a:p>
             <a:r>
               <a:t>Ten seconds. No preamble.</a:t>
+            </a:r>
+          </a:p>
+        </p:txBody>
+      </p:sp>
+      <p:sp>
+        <p:nvSpPr>
+          <p:cNvPr id="4" name="Slide Number Placeholder 3"/>
+          <p:cNvSpPr>
+            <a:spLocks noGrp="1"/>
+          </p:cNvSpPr>
+          <p:nvPr>
+            <p:ph type="sldNum" idx="5" sz="quarter"/>
+          </p:nvPr>
+        </p:nvSpPr>
+        <p:spPr/>
+      </p:sp>
+    </p:spTree>
+  </p:cSld>
+  <p:clrMapOvr>
+    <a:masterClrMapping/>
+  </p:clrMapOvr>
+</p:notes>
+</file>
+
+<file path=ppt/notesSlides/notesSlide10.xml><?xml version="1.0" encoding="utf-8"?>
+<p:notes xmlns:a="http://schemas.openxmlformats.org/drawingml/2006/main" xmlns:p="http://schemas.openxmlformats.org/presentationml/2006/main" xmlns:r="http://schemas.openxmlformats.org/officeDocument/2006/relationships">
+  <p:cSld>
+    <p:spTree>
+      <p:nvGrpSpPr>
+        <p:cNvPr id="1" name=""/>
+        <p:cNvGrpSpPr/>
+        <p:nvPr/>
+      </p:nvGrpSpPr>
+      <p:grpSpPr>
+        <a:xfrm>
+          <a:off x="0" y="0"/>
+          <a:ext cx="0" cy="0"/>
+          <a:chOff x="0" y="0"/>
+          <a:chExt cx="0" cy="0"/>
+        </a:xfrm>
+      </p:grpSpPr>
+      <p:sp>
+        <p:nvSpPr>
+          <p:cNvPr id="2" name="Slide Image Placeholder 1"/>
+          <p:cNvSpPr>
+            <a:spLocks noGrp="1"/>
+          </p:cNvSpPr>
+          <p:nvPr>
+            <p:ph type="sldImg" idx="2"/>
+          </p:nvPr>
+        </p:nvSpPr>
+        <p:spPr/>
+      </p:sp>
+      <p:sp>
+        <p:nvSpPr>
+          <p:cNvPr id="3" name="Notes Placeholder 2"/>
+          <p:cNvSpPr>
+            <a:spLocks noGrp="1"/>
+          </p:cNvSpPr>
+          <p:nvPr>
+            <p:ph type="body" idx="3" sz="quarter"/>
+          </p:nvPr>
+        </p:nvSpPr>
+        <p:spPr/>
+        <p:txBody>
+          <a:bodyPr/>
+          <a:lstStyle/>
+          <a:p>
+            <a:r>
+              <a:t>Almost nothing. Advance to this as you say "happy to take questions", give it one line — "and that's us; do get in touch" — and leave it up. **Do not read your own bio aloud**; they can read, and narrating it is the one way to make it awkward. The reason this slide exists is that it stays on screen for the whole of Q&amp;A, which is the most-looked-at minute of the meeting.</a:t>
             </a:r>
           </a:p>
         </p:txBody>
@@ -4178,6 +4249,302 @@
                 </a:solidFill>
               </a:rPr>
               <a:t>•  Twelve weeks: 26 June – 22 September 2026</a:t>
+            </a:r>
+          </a:p>
+        </p:txBody>
+      </p:sp>
+    </p:spTree>
+  </p:cSld>
+  <p:clrMapOvr>
+    <a:masterClrMapping/>
+  </p:clrMapOvr>
+</p:sld>
+</file>
+
+<file path=ppt/slides/slide10.xml><?xml version="1.0" encoding="utf-8"?>
+<p:sld xmlns:a="http://schemas.openxmlformats.org/drawingml/2006/main" xmlns:p="http://schemas.openxmlformats.org/presentationml/2006/main" xmlns:r="http://schemas.openxmlformats.org/officeDocument/2006/relationships">
+  <p:cSld>
+    <p:spTree>
+      <p:nvGrpSpPr>
+        <p:cNvPr id="1" name=""/>
+        <p:cNvGrpSpPr/>
+        <p:nvPr/>
+      </p:nvGrpSpPr>
+      <p:grpSpPr/>
+      <p:sp>
+        <p:nvSpPr>
+          <p:cNvPr id="2" name="TextBox 1"/>
+          <p:cNvSpPr txBox="1"/>
+          <p:nvPr/>
+        </p:nvSpPr>
+        <p:spPr>
+          <a:xfrm>
+            <a:off x="502920" y="310896"/>
+            <a:ext cx="8138160" cy="731520"/>
+          </a:xfrm>
+          <a:prstGeom prst="rect">
+            <a:avLst/>
+          </a:prstGeom>
+          <a:noFill/>
+        </p:spPr>
+        <p:txBody>
+          <a:bodyPr wrap="square">
+            <a:spAutoFit/>
+          </a:bodyPr>
+          <a:lstStyle/>
+          <a:p>
+            <a:pPr>
+              <a:spcAft>
+                <a:spcPts val="300"/>
+              </a:spcAft>
+            </a:pPr>
+            <a:r>
+              <a:rPr sz="2300" b="1">
+                <a:solidFill>
+                  <a:srgbClr val="1F4E79"/>
+                </a:solidFill>
+              </a:rPr>
+              <a:t>The team</a:t>
+            </a:r>
+          </a:p>
+        </p:txBody>
+      </p:sp>
+      <p:sp>
+        <p:nvSpPr>
+          <p:cNvPr id="3" name="Rectangle 2"/>
+          <p:cNvSpPr/>
+          <p:nvPr/>
+        </p:nvSpPr>
+        <p:spPr>
+          <a:xfrm>
+            <a:off x="4565650" y="1078992"/>
+            <a:ext cx="12700" cy="3561588"/>
+          </a:xfrm>
+          <a:prstGeom prst="rect">
+            <a:avLst/>
+          </a:prstGeom>
+          <a:solidFill>
+            <a:srgbClr val="D9D9D9"/>
+          </a:solidFill>
+          <a:ln>
+            <a:noFill/>
+          </a:ln>
+          <a:effectLst/>
+        </p:spPr>
+        <p:style>
+          <a:lnRef idx="1">
+            <a:schemeClr val="accent1"/>
+          </a:lnRef>
+          <a:fillRef idx="3">
+            <a:schemeClr val="accent1"/>
+          </a:fillRef>
+          <a:effectRef idx="2">
+            <a:schemeClr val="accent1"/>
+          </a:effectRef>
+          <a:fontRef idx="minor">
+            <a:schemeClr val="lt1"/>
+          </a:fontRef>
+        </p:style>
+        <p:txBody>
+          <a:bodyPr rtlCol="0" anchor="ctr"/>
+          <a:lstStyle/>
+          <a:p>
+            <a:pPr algn="ctr"/>
+          </a:p>
+        </p:txBody>
+      </p:sp>
+      <p:sp>
+        <p:nvSpPr>
+          <p:cNvPr id="4" name="TextBox 3"/>
+          <p:cNvSpPr txBox="1"/>
+          <p:nvPr/>
+        </p:nvSpPr>
+        <p:spPr>
+          <a:xfrm>
+            <a:off x="502920" y="1078992"/>
+            <a:ext cx="3817620" cy="3744468"/>
+          </a:xfrm>
+          <a:prstGeom prst="rect">
+            <a:avLst/>
+          </a:prstGeom>
+          <a:noFill/>
+        </p:spPr>
+        <p:txBody>
+          <a:bodyPr wrap="square">
+            <a:spAutoFit/>
+          </a:bodyPr>
+          <a:lstStyle/>
+          <a:p>
+            <a:pPr>
+              <a:spcAft>
+                <a:spcPts val="700"/>
+              </a:spcAft>
+            </a:pPr>
+            <a:r>
+              <a:rPr sz="1700" b="1">
+                <a:solidFill>
+                  <a:srgbClr val="1F4E79"/>
+                </a:solidFill>
+              </a:rPr>
+              <a:t>Lichen Chen</a:t>
+            </a:r>
+          </a:p>
+          <a:p>
+            <a:pPr>
+              <a:spcAft>
+                <a:spcPts val="800"/>
+              </a:spcAft>
+            </a:pPr>
+            <a:r>
+              <a:rPr sz="1200" b="0">
+                <a:solidFill>
+                  <a:srgbClr val="262626"/>
+                </a:solidFill>
+              </a:rPr>
+              <a:t>&lt;&lt;DEGREE PROGRAMME&gt;&gt;, Columbia University · &lt;&lt;GRADUATING MONTH YEAR&gt;&gt;</a:t>
+            </a:r>
+          </a:p>
+          <a:p>
+            <a:pPr>
+              <a:spcAft>
+                <a:spcPts val="800"/>
+              </a:spcAft>
+            </a:pPr>
+            <a:r>
+              <a:rPr sz="1200" b="0">
+                <a:solidFill>
+                  <a:srgbClr val="262626"/>
+                </a:solidFill>
+              </a:rPr>
+              <a:t>Built the instrument pricing engines, the calibration and risk layer, and the Excel-to-Python interface.</a:t>
+            </a:r>
+          </a:p>
+          <a:p>
+            <a:pPr>
+              <a:spcAft>
+                <a:spcPts val="800"/>
+              </a:spcAft>
+            </a:pPr>
+            <a:r>
+              <a:rPr sz="1200" b="0">
+                <a:solidFill>
+                  <a:srgbClr val="262626"/>
+                </a:solidFill>
+              </a:rPr>
+              <a:t>&lt;&lt;ONE LINE OF BACKGROUND BEFORE THIS — an internship, a role, a degree. Delete this row if you would rather not.&gt;&gt;</a:t>
+            </a:r>
+          </a:p>
+          <a:p>
+            <a:pPr>
+              <a:spcAft>
+                <a:spcPts val="800"/>
+              </a:spcAft>
+            </a:pPr>
+            <a:r>
+              <a:rPr sz="1200" b="0">
+                <a:solidFill>
+                  <a:srgbClr val="262626"/>
+                </a:solidFill>
+              </a:rPr>
+              <a:t>lc3904@columbia.edu</a:t>
+            </a:r>
+          </a:p>
+        </p:txBody>
+      </p:sp>
+      <p:sp>
+        <p:nvSpPr>
+          <p:cNvPr id="5" name="TextBox 4"/>
+          <p:cNvSpPr txBox="1"/>
+          <p:nvPr/>
+        </p:nvSpPr>
+        <p:spPr>
+          <a:xfrm>
+            <a:off x="4823460" y="1078992"/>
+            <a:ext cx="3817620" cy="3744468"/>
+          </a:xfrm>
+          <a:prstGeom prst="rect">
+            <a:avLst/>
+          </a:prstGeom>
+          <a:noFill/>
+        </p:spPr>
+        <p:txBody>
+          <a:bodyPr wrap="square">
+            <a:spAutoFit/>
+          </a:bodyPr>
+          <a:lstStyle/>
+          <a:p>
+            <a:pPr>
+              <a:spcAft>
+                <a:spcPts val="700"/>
+              </a:spcAft>
+            </a:pPr>
+            <a:r>
+              <a:rPr sz="1700" b="1">
+                <a:solidFill>
+                  <a:srgbClr val="1F4E79"/>
+                </a:solidFill>
+              </a:rPr>
+              <a:t>Liping Yin</a:t>
+            </a:r>
+          </a:p>
+          <a:p>
+            <a:pPr>
+              <a:spcAft>
+                <a:spcPts val="800"/>
+              </a:spcAft>
+            </a:pPr>
+            <a:r>
+              <a:rPr sz="1200" b="0">
+                <a:solidFill>
+                  <a:srgbClr val="262626"/>
+                </a:solidFill>
+              </a:rPr>
+              <a:t>&lt;&lt;LIPING: programme / affiliation&gt;&gt;</a:t>
+            </a:r>
+          </a:p>
+          <a:p>
+            <a:pPr>
+              <a:spcAft>
+                <a:spcPts val="800"/>
+              </a:spcAft>
+            </a:pPr>
+            <a:r>
+              <a:rPr sz="1200" b="0">
+                <a:solidFill>
+                  <a:srgbClr val="262626"/>
+                </a:solidFill>
+              </a:rPr>
+              <a:t>&lt;&lt;LIPING: what you did on this project&gt;&gt;</a:t>
+            </a:r>
+          </a:p>
+          <a:p>
+            <a:pPr>
+              <a:spcAft>
+                <a:spcPts val="800"/>
+              </a:spcAft>
+            </a:pPr>
+            <a:r>
+              <a:rPr sz="1200" b="0">
+                <a:solidFill>
+                  <a:srgbClr val="262626"/>
+                </a:solidFill>
+              </a:rPr>
+              <a:t>&lt;&lt;LIPING: one line of background, or delete this row&gt;&gt;</a:t>
+            </a:r>
+          </a:p>
+          <a:p>
+            <a:pPr>
+              <a:spcAft>
+                <a:spcPts val="800"/>
+              </a:spcAft>
+            </a:pPr>
+            <a:r>
+              <a:rPr sz="1200" b="0">
+                <a:solidFill>
+                  <a:srgbClr val="262626"/>
+                </a:solidFill>
+              </a:rPr>
+              <a:t>&lt;&lt;LIPING: contact&gt;&gt;</a:t>
             </a:r>
           </a:p>
         </p:txBody>

--- a/docs/Ryse Presentation v6.pptx
+++ b/docs/Ryse Presentation v6.pptx
@@ -4386,7 +4386,7 @@
                   <a:srgbClr val="1F4E79"/>
                 </a:solidFill>
               </a:rPr>
-              <a:t>Lichen Chen</a:t>
+              <a:t>Lichen Chen (Charlie)</a:t>
             </a:r>
           </a:p>
           <a:p>
@@ -4401,7 +4401,7 @@
                   <a:srgbClr val="262626"/>
                 </a:solidFill>
               </a:rPr>
-              <a:t>&lt;&lt;DEGREE PROGRAMME&gt;&gt;, Columbia University · &lt;&lt;GRADUATING MONTH YEAR&gt;&gt;</a:t>
+              <a:t>MS Business Analytics, Columbia University · BS Mathematics, University of Michigan</a:t>
             </a:r>
           </a:p>
           <a:p>
@@ -4416,7 +4416,7 @@
                   <a:srgbClr val="262626"/>
                 </a:solidFill>
               </a:rPr>
-              <a:t>Built the instrument pricing engines, the calibration and risk layer, and the Excel-to-Python interface.</a:t>
+              <a:t>On this project: built the instrument pricing engines, the calibration and risk layer, and the Excel-to-Python interface.</a:t>
             </a:r>
           </a:p>
           <a:p>
@@ -4431,7 +4431,7 @@
                   <a:srgbClr val="262626"/>
                 </a:solidFill>
               </a:rPr>
-              <a:t>&lt;&lt;ONE LINE OF BACKGROUND BEFORE THIS — an internship, a role, a degree. Delete this row if you would rather not.&gt;&gt;</a:t>
+              <a:t>Quantitative research internships at Turing Fund and QiLin Investment, both $2.8B+ funds — equity alpha factors, volatility forecasting, and tick-level market microstructure.</a:t>
             </a:r>
           </a:p>
           <a:p>
@@ -4446,7 +4446,22 @@
                   <a:srgbClr val="262626"/>
                 </a:solidFill>
               </a:rPr>
-              <a:t>lc3904@columbia.edu</a:t>
+              <a:t>Single-authored working paper on forecasting realized volatility with econometric-informed deep learning.</a:t>
+            </a:r>
+          </a:p>
+          <a:p>
+            <a:pPr>
+              <a:spcAft>
+                <a:spcPts val="800"/>
+              </a:spcAft>
+            </a:pPr>
+            <a:r>
+              <a:rPr sz="1200" b="0">
+                <a:solidFill>
+                  <a:srgbClr val="262626"/>
+                </a:solidFill>
+              </a:rPr>
+              <a:t>lc3904@columbia.edu · linkedin.com/in/lichen-chen-567982174</a:t>
             </a:r>
           </a:p>
         </p:txBody>

--- a/docs/Ryse Presentation v6.pptx
+++ b/docs/Ryse Presentation v6.pptx
@@ -4,19 +4,22 @@
   <p:sldMasterIdLst>
     <p:sldMasterId id="2147483648" r:id="rId1"/>
   </p:sldMasterIdLst>
+  <p:notesMasterIdLst>
+    <p:notesMasterId r:id="rId12"/>
+  </p:notesMasterIdLst>
   <p:sldIdLst>
-    <p:sldId id="256" r:id="rId7"/>
-    <p:sldId id="257" r:id="rId9"/>
-    <p:sldId id="258" r:id="rId10"/>
-    <p:sldId id="259" r:id="rId11"/>
-    <p:sldId id="260" r:id="rId12"/>
-    <p:sldId id="261" r:id="rId13"/>
-    <p:sldId id="262" r:id="rId14"/>
-    <p:sldId id="263" r:id="rId15"/>
-    <p:sldId id="264" r:id="rId16"/>
-    <p:sldId id="265" r:id="rId17"/>
+    <p:sldId id="256" r:id="rId2"/>
+    <p:sldId id="257" r:id="rId3"/>
+    <p:sldId id="258" r:id="rId4"/>
+    <p:sldId id="259" r:id="rId5"/>
+    <p:sldId id="260" r:id="rId6"/>
+    <p:sldId id="261" r:id="rId7"/>
+    <p:sldId id="262" r:id="rId8"/>
+    <p:sldId id="263" r:id="rId9"/>
+    <p:sldId id="264" r:id="rId10"/>
+    <p:sldId id="265" r:id="rId11"/>
   </p:sldIdLst>
-  <p:sldSz cx="9144000" cy="5143500" type="screen4x3"/>
+  <p:sldSz cx="9144000" cy="5143500" type="screen16x9"/>
   <p:notesSz cx="6858000" cy="9144000"/>
   <p:defaultTextStyle>
     <a:defPPr>
@@ -113,11 +116,27 @@
       </a:defRPr>
     </a:lvl9pPr>
   </p:defaultTextStyle>
+  <p:extLst>
+    <p:ext uri="{EFAFB233-063F-42B5-8137-9DF3F51BA10A}">
+      <p15:sldGuideLst xmlns:p15="http://schemas.microsoft.com/office/powerpoint/2012/main">
+        <p15:guide id="1" orient="horz" pos="2160">
+          <p15:clr>
+            <a:srgbClr val="A4A3A4"/>
+          </p15:clr>
+        </p15:guide>
+        <p15:guide id="2" pos="2880">
+          <p15:clr>
+            <a:srgbClr val="A4A3A4"/>
+          </p15:clr>
+        </p15:guide>
+      </p15:sldGuideLst>
+    </p:ext>
+  </p:extLst>
 </p:presentation>
 </file>
 
 <file path=ppt/notesMasters/notesMaster1.xml><?xml version="1.0" encoding="utf-8"?>
-<p:notesMaster xmlns:a="http://schemas.openxmlformats.org/drawingml/2006/main" xmlns:p="http://schemas.openxmlformats.org/presentationml/2006/main" xmlns:r="http://schemas.openxmlformats.org/officeDocument/2006/relationships">
+<p:notesMaster xmlns:a="http://schemas.openxmlformats.org/drawingml/2006/main" xmlns:r="http://schemas.openxmlformats.org/officeDocument/2006/relationships" xmlns:p="http://schemas.openxmlformats.org/presentationml/2006/main">
   <p:cSld>
     <p:bg>
       <p:bgRef idx="1001">
@@ -138,241 +157,16 @@
           <a:chExt cx="0" cy="0"/>
         </a:xfrm>
       </p:grpSpPr>
-      <p:sp>
-        <p:nvSpPr>
-          <p:cNvPr id="2" name="Header Placeholder 1"/>
-          <p:cNvSpPr>
-            <a:spLocks noGrp="1"/>
-          </p:cNvSpPr>
-          <p:nvPr>
-            <p:ph type="hdr" sz="quarter"/>
-          </p:nvPr>
-        </p:nvSpPr>
-        <p:spPr>
-          <a:xfrm>
-            <a:off x="0" y="0"/>
-            <a:ext cx="2971800" cy="457200"/>
-          </a:xfrm>
-          <a:prstGeom prst="rect">
-            <a:avLst/>
-          </a:prstGeom>
-        </p:spPr>
-        <p:txBody>
-          <a:bodyPr vert="horz" lIns="91440" tIns="45720" rIns="91440" bIns="45720" rtlCol="0"/>
-          <a:lstStyle>
-            <a:lvl1pPr algn="l">
-              <a:defRPr sz="1200"/>
-            </a:lvl1pPr>
-          </a:lstStyle>
-          <a:p>
-            <a:endParaRPr lang="en-US"/>
-          </a:p>
-        </p:txBody>
-      </p:sp>
-      <p:sp>
-        <p:nvSpPr>
-          <p:cNvPr id="3" name="Date Placeholder 2"/>
-          <p:cNvSpPr>
-            <a:spLocks noGrp="1"/>
-          </p:cNvSpPr>
-          <p:nvPr>
-            <p:ph type="dt" idx="1"/>
-          </p:nvPr>
-        </p:nvSpPr>
-        <p:spPr>
-          <a:xfrm>
-            <a:off x="3884613" y="0"/>
-            <a:ext cx="2971800" cy="457200"/>
-          </a:xfrm>
-          <a:prstGeom prst="rect">
-            <a:avLst/>
-          </a:prstGeom>
-        </p:spPr>
-        <p:txBody>
-          <a:bodyPr vert="horz" lIns="91440" tIns="45720" rIns="91440" bIns="45720" rtlCol="0"/>
-          <a:lstStyle>
-            <a:lvl1pPr algn="r">
-              <a:defRPr sz="1200"/>
-            </a:lvl1pPr>
-          </a:lstStyle>
-          <a:p>
-            <a:fld id="{0F89C1C7-3DCD-1040-A9CF-14679D8B5DDD}" type="datetimeFigureOut">
-              <a:rPr lang="en-US" smtClean="0"/>
-              <a:t>10/17/16</a:t>
-            </a:fld>
-            <a:endParaRPr lang="en-US"/>
-          </a:p>
-        </p:txBody>
-      </p:sp>
-      <p:sp>
-        <p:nvSpPr>
-          <p:cNvPr id="4" name="Slide Image Placeholder 3"/>
-          <p:cNvSpPr>
-            <a:spLocks noGrp="1" noRot="1" noChangeAspect="1"/>
-          </p:cNvSpPr>
-          <p:nvPr>
-            <p:ph type="sldImg" idx="2"/>
-          </p:nvPr>
-        </p:nvSpPr>
-        <p:spPr>
-          <a:xfrm>
-            <a:off x="1143000" y="685800"/>
-            <a:ext cx="4572000" cy="3429000"/>
-          </a:xfrm>
-          <a:prstGeom prst="rect">
-            <a:avLst/>
-          </a:prstGeom>
-          <a:noFill/>
-          <a:ln w="12700">
-            <a:solidFill>
-              <a:prstClr val="black"/>
-            </a:solidFill>
-          </a:ln>
-        </p:spPr>
-        <p:txBody>
-          <a:bodyPr vert="horz" lIns="91440" tIns="45720" rIns="91440" bIns="45720" rtlCol="0" anchor="ctr"/>
-          <a:lstStyle/>
-          <a:p>
-            <a:endParaRPr lang="en-US"/>
-          </a:p>
-        </p:txBody>
-      </p:sp>
-      <p:sp>
-        <p:nvSpPr>
-          <p:cNvPr id="5" name="Notes Placeholder 4"/>
-          <p:cNvSpPr>
-            <a:spLocks noGrp="1"/>
-          </p:cNvSpPr>
-          <p:nvPr>
-            <p:ph type="body" sz="quarter" idx="3"/>
-          </p:nvPr>
-        </p:nvSpPr>
-        <p:spPr>
-          <a:xfrm>
-            <a:off x="685800" y="4343400"/>
-            <a:ext cx="5486400" cy="4114800"/>
-          </a:xfrm>
-          <a:prstGeom prst="rect">
-            <a:avLst/>
-          </a:prstGeom>
-        </p:spPr>
-        <p:txBody>
-          <a:bodyPr vert="horz" lIns="91440" tIns="45720" rIns="91440" bIns="45720" rtlCol="0"/>
-          <a:lstStyle/>
-          <a:p>
-            <a:pPr lvl="0"/>
-            <a:r>
-              <a:rPr lang="en-US" smtClean="0"/>
-              <a:t>Click to edit Master text styles</a:t>
-            </a:r>
-          </a:p>
-          <a:p>
-            <a:pPr lvl="1"/>
-            <a:r>
-              <a:rPr lang="en-US" smtClean="0"/>
-              <a:t>Second level</a:t>
-            </a:r>
-          </a:p>
-          <a:p>
-            <a:pPr lvl="2"/>
-            <a:r>
-              <a:rPr lang="en-US" smtClean="0"/>
-              <a:t>Third level</a:t>
-            </a:r>
-          </a:p>
-          <a:p>
-            <a:pPr lvl="3"/>
-            <a:r>
-              <a:rPr lang="en-US" smtClean="0"/>
-              <a:t>Fourth level</a:t>
-            </a:r>
-          </a:p>
-          <a:p>
-            <a:pPr lvl="4"/>
-            <a:r>
-              <a:rPr lang="en-US" smtClean="0"/>
-              <a:t>Fifth level</a:t>
-            </a:r>
-            <a:endParaRPr lang="en-US"/>
-          </a:p>
-        </p:txBody>
-      </p:sp>
-      <p:sp>
-        <p:nvSpPr>
-          <p:cNvPr id="6" name="Footer Placeholder 5"/>
-          <p:cNvSpPr>
-            <a:spLocks noGrp="1"/>
-          </p:cNvSpPr>
-          <p:nvPr>
-            <p:ph type="ftr" sz="quarter" idx="4"/>
-          </p:nvPr>
-        </p:nvSpPr>
-        <p:spPr>
-          <a:xfrm>
-            <a:off x="0" y="8685213"/>
-            <a:ext cx="2971800" cy="457200"/>
-          </a:xfrm>
-          <a:prstGeom prst="rect">
-            <a:avLst/>
-          </a:prstGeom>
-        </p:spPr>
-        <p:txBody>
-          <a:bodyPr vert="horz" lIns="91440" tIns="45720" rIns="91440" bIns="45720" rtlCol="0" anchor="b"/>
-          <a:lstStyle>
-            <a:lvl1pPr algn="l">
-              <a:defRPr sz="1200"/>
-            </a:lvl1pPr>
-          </a:lstStyle>
-          <a:p>
-            <a:endParaRPr lang="en-US"/>
-          </a:p>
-        </p:txBody>
-      </p:sp>
-      <p:sp>
-        <p:nvSpPr>
-          <p:cNvPr id="7" name="Slide Number Placeholder 6"/>
-          <p:cNvSpPr>
-            <a:spLocks noGrp="1"/>
-          </p:cNvSpPr>
-          <p:nvPr>
-            <p:ph type="sldNum" sz="quarter" idx="5"/>
-          </p:nvPr>
-        </p:nvSpPr>
-        <p:spPr>
-          <a:xfrm>
-            <a:off x="3884613" y="8685213"/>
-            <a:ext cx="2971800" cy="457200"/>
-          </a:xfrm>
-          <a:prstGeom prst="rect">
-            <a:avLst/>
-          </a:prstGeom>
-        </p:spPr>
-        <p:txBody>
-          <a:bodyPr vert="horz" lIns="91440" tIns="45720" rIns="91440" bIns="45720" rtlCol="0" anchor="b"/>
-          <a:lstStyle>
-            <a:lvl1pPr algn="r">
-              <a:defRPr sz="1200"/>
-            </a:lvl1pPr>
-          </a:lstStyle>
-          <a:p>
-            <a:fld id="{BB5E49A5-4136-284D-997B-48E1D791AD67}" type="slidenum">
-              <a:rPr lang="en-US" smtClean="0"/>
-              <a:t>‹#›</a:t>
-            </a:fld>
-            <a:endParaRPr lang="en-US"/>
-          </a:p>
-        </p:txBody>
-      </p:sp>
     </p:spTree>
     <p:extLst>
       <p:ext uri="{BB962C8B-B14F-4D97-AF65-F5344CB8AC3E}">
-        <p14:creationId xmlns:p14="http://schemas.microsoft.com/office/powerpoint/2010/main" val="2623252185"/>
+        <p14:creationId xmlns:p14="http://schemas.microsoft.com/office/powerpoint/2010/main" val="2616675905"/>
       </p:ext>
     </p:extLst>
   </p:cSld>
   <p:clrMap bg1="lt1" tx1="dk1" bg2="lt2" tx2="dk2" accent1="accent1" accent2="accent2" accent3="accent3" accent4="accent4" accent5="accent5" accent6="accent6" hlink="hlink" folHlink="folHlink"/>
   <p:notesStyle>
-    <a:lvl1pPr marL="0" algn="l" defTabSz="457200" rtl="0" eaLnBrk="1" latinLnBrk="0" hangingPunct="1">
+    <a:lvl1pPr marL="0" algn="l" defTabSz="914400" rtl="0" eaLnBrk="1" latinLnBrk="0" hangingPunct="1">
       <a:defRPr sz="1200" kern="1200">
         <a:solidFill>
           <a:schemeClr val="tx1"/>
@@ -382,7 +176,7 @@
         <a:cs typeface="+mn-cs"/>
       </a:defRPr>
     </a:lvl1pPr>
-    <a:lvl2pPr marL="457200" algn="l" defTabSz="457200" rtl="0" eaLnBrk="1" latinLnBrk="0" hangingPunct="1">
+    <a:lvl2pPr marL="457200" algn="l" defTabSz="914400" rtl="0" eaLnBrk="1" latinLnBrk="0" hangingPunct="1">
       <a:defRPr sz="1200" kern="1200">
         <a:solidFill>
           <a:schemeClr val="tx1"/>
@@ -392,7 +186,7 @@
         <a:cs typeface="+mn-cs"/>
       </a:defRPr>
     </a:lvl2pPr>
-    <a:lvl3pPr marL="914400" algn="l" defTabSz="457200" rtl="0" eaLnBrk="1" latinLnBrk="0" hangingPunct="1">
+    <a:lvl3pPr marL="914400" algn="l" defTabSz="914400" rtl="0" eaLnBrk="1" latinLnBrk="0" hangingPunct="1">
       <a:defRPr sz="1200" kern="1200">
         <a:solidFill>
           <a:schemeClr val="tx1"/>
@@ -402,7 +196,7 @@
         <a:cs typeface="+mn-cs"/>
       </a:defRPr>
     </a:lvl3pPr>
-    <a:lvl4pPr marL="1371600" algn="l" defTabSz="457200" rtl="0" eaLnBrk="1" latinLnBrk="0" hangingPunct="1">
+    <a:lvl4pPr marL="1371600" algn="l" defTabSz="914400" rtl="0" eaLnBrk="1" latinLnBrk="0" hangingPunct="1">
       <a:defRPr sz="1200" kern="1200">
         <a:solidFill>
           <a:schemeClr val="tx1"/>
@@ -412,7 +206,7 @@
         <a:cs typeface="+mn-cs"/>
       </a:defRPr>
     </a:lvl4pPr>
-    <a:lvl5pPr marL="1828800" algn="l" defTabSz="457200" rtl="0" eaLnBrk="1" latinLnBrk="0" hangingPunct="1">
+    <a:lvl5pPr marL="1828800" algn="l" defTabSz="914400" rtl="0" eaLnBrk="1" latinLnBrk="0" hangingPunct="1">
       <a:defRPr sz="1200" kern="1200">
         <a:solidFill>
           <a:schemeClr val="tx1"/>
@@ -422,7 +216,7 @@
         <a:cs typeface="+mn-cs"/>
       </a:defRPr>
     </a:lvl5pPr>
-    <a:lvl6pPr marL="2286000" algn="l" defTabSz="457200" rtl="0" eaLnBrk="1" latinLnBrk="0" hangingPunct="1">
+    <a:lvl6pPr marL="2286000" algn="l" defTabSz="914400" rtl="0" eaLnBrk="1" latinLnBrk="0" hangingPunct="1">
       <a:defRPr sz="1200" kern="1200">
         <a:solidFill>
           <a:schemeClr val="tx1"/>
@@ -432,7 +226,7 @@
         <a:cs typeface="+mn-cs"/>
       </a:defRPr>
     </a:lvl6pPr>
-    <a:lvl7pPr marL="2743200" algn="l" defTabSz="457200" rtl="0" eaLnBrk="1" latinLnBrk="0" hangingPunct="1">
+    <a:lvl7pPr marL="2743200" algn="l" defTabSz="914400" rtl="0" eaLnBrk="1" latinLnBrk="0" hangingPunct="1">
       <a:defRPr sz="1200" kern="1200">
         <a:solidFill>
           <a:schemeClr val="tx1"/>
@@ -442,7 +236,7 @@
         <a:cs typeface="+mn-cs"/>
       </a:defRPr>
     </a:lvl7pPr>
-    <a:lvl8pPr marL="3200400" algn="l" defTabSz="457200" rtl="0" eaLnBrk="1" latinLnBrk="0" hangingPunct="1">
+    <a:lvl8pPr marL="3200400" algn="l" defTabSz="914400" rtl="0" eaLnBrk="1" latinLnBrk="0" hangingPunct="1">
       <a:defRPr sz="1200" kern="1200">
         <a:solidFill>
           <a:schemeClr val="tx1"/>
@@ -452,7 +246,7 @@
         <a:cs typeface="+mn-cs"/>
       </a:defRPr>
     </a:lvl8pPr>
-    <a:lvl9pPr marL="3657600" algn="l" defTabSz="457200" rtl="0" eaLnBrk="1" latinLnBrk="0" hangingPunct="1">
+    <a:lvl9pPr marL="3657600" algn="l" defTabSz="914400" rtl="0" eaLnBrk="1" latinLnBrk="0" hangingPunct="1">
       <a:defRPr sz="1200" kern="1200">
         <a:solidFill>
           <a:schemeClr val="tx1"/>
@@ -467,7 +261,7 @@
 </file>
 
 <file path=ppt/notesSlides/notesSlide1.xml><?xml version="1.0" encoding="utf-8"?>
-<p:notes xmlns:a="http://schemas.openxmlformats.org/drawingml/2006/main" xmlns:p="http://schemas.openxmlformats.org/presentationml/2006/main" xmlns:r="http://schemas.openxmlformats.org/officeDocument/2006/relationships">
+<p:notes xmlns:a="http://schemas.openxmlformats.org/drawingml/2006/main" xmlns:r="http://schemas.openxmlformats.org/officeDocument/2006/relationships" xmlns:p="http://schemas.openxmlformats.org/presentationml/2006/main">
   <p:cSld>
     <p:spTree>
       <p:nvGrpSpPr>
@@ -487,7 +281,7 @@
         <p:nvSpPr>
           <p:cNvPr id="2" name="Slide Image Placeholder 1"/>
           <p:cNvSpPr>
-            <a:spLocks noGrp="1"/>
+            <a:spLocks noGrp="1" noRot="1" noChangeAspect="1"/>
           </p:cNvSpPr>
           <p:nvPr>
             <p:ph type="sldImg" idx="2"/>
@@ -502,7 +296,7 @@
             <a:spLocks noGrp="1"/>
           </p:cNvSpPr>
           <p:nvPr>
-            <p:ph type="body" idx="3" sz="quarter"/>
+            <p:ph type="body" sz="quarter" idx="3"/>
           </p:nvPr>
         </p:nvSpPr>
         <p:spPr/>
@@ -523,7 +317,7 @@
             <a:spLocks noGrp="1"/>
           </p:cNvSpPr>
           <p:nvPr>
-            <p:ph type="sldNum" idx="5" sz="quarter"/>
+            <p:ph type="sldNum" sz="quarter" idx="5"/>
           </p:nvPr>
         </p:nvSpPr>
         <p:spPr/>
@@ -537,7 +331,7 @@
 </file>
 
 <file path=ppt/notesSlides/notesSlide10.xml><?xml version="1.0" encoding="utf-8"?>
-<p:notes xmlns:a="http://schemas.openxmlformats.org/drawingml/2006/main" xmlns:p="http://schemas.openxmlformats.org/presentationml/2006/main" xmlns:r="http://schemas.openxmlformats.org/officeDocument/2006/relationships">
+<p:notes xmlns:a="http://schemas.openxmlformats.org/drawingml/2006/main" xmlns:r="http://schemas.openxmlformats.org/officeDocument/2006/relationships" xmlns:p="http://schemas.openxmlformats.org/presentationml/2006/main">
   <p:cSld>
     <p:spTree>
       <p:nvGrpSpPr>
@@ -557,7 +351,7 @@
         <p:nvSpPr>
           <p:cNvPr id="2" name="Slide Image Placeholder 1"/>
           <p:cNvSpPr>
-            <a:spLocks noGrp="1"/>
+            <a:spLocks noGrp="1" noRot="1" noChangeAspect="1"/>
           </p:cNvSpPr>
           <p:nvPr>
             <p:ph type="sldImg" idx="2"/>
@@ -572,7 +366,7 @@
             <a:spLocks noGrp="1"/>
           </p:cNvSpPr>
           <p:nvPr>
-            <p:ph type="body" idx="3" sz="quarter"/>
+            <p:ph type="body" sz="quarter" idx="3"/>
           </p:nvPr>
         </p:nvSpPr>
         <p:spPr/>
@@ -593,7 +387,7 @@
             <a:spLocks noGrp="1"/>
           </p:cNvSpPr>
           <p:nvPr>
-            <p:ph type="sldNum" idx="5" sz="quarter"/>
+            <p:ph type="sldNum" sz="quarter" idx="5"/>
           </p:nvPr>
         </p:nvSpPr>
         <p:spPr/>
@@ -607,7 +401,7 @@
 </file>
 
 <file path=ppt/notesSlides/notesSlide2.xml><?xml version="1.0" encoding="utf-8"?>
-<p:notes xmlns:a="http://schemas.openxmlformats.org/drawingml/2006/main" xmlns:p="http://schemas.openxmlformats.org/presentationml/2006/main" xmlns:r="http://schemas.openxmlformats.org/officeDocument/2006/relationships">
+<p:notes xmlns:a="http://schemas.openxmlformats.org/drawingml/2006/main" xmlns:r="http://schemas.openxmlformats.org/officeDocument/2006/relationships" xmlns:p="http://schemas.openxmlformats.org/presentationml/2006/main">
   <p:cSld>
     <p:spTree>
       <p:nvGrpSpPr>
@@ -627,7 +421,7 @@
         <p:nvSpPr>
           <p:cNvPr id="2" name="Slide Image Placeholder 1"/>
           <p:cNvSpPr>
-            <a:spLocks noGrp="1"/>
+            <a:spLocks noGrp="1" noRot="1" noChangeAspect="1"/>
           </p:cNvSpPr>
           <p:nvPr>
             <p:ph type="sldImg" idx="2"/>
@@ -642,7 +436,7 @@
             <a:spLocks noGrp="1"/>
           </p:cNvSpPr>
           <p:nvPr>
-            <p:ph type="body" idx="3" sz="quarter"/>
+            <p:ph type="body" sz="quarter" idx="3"/>
           </p:nvPr>
         </p:nvSpPr>
         <p:spPr/>
@@ -663,7 +457,7 @@
             <a:spLocks noGrp="1"/>
           </p:cNvSpPr>
           <p:nvPr>
-            <p:ph type="sldNum" idx="5" sz="quarter"/>
+            <p:ph type="sldNum" sz="quarter" idx="5"/>
           </p:nvPr>
         </p:nvSpPr>
         <p:spPr/>
@@ -677,7 +471,7 @@
 </file>
 
 <file path=ppt/notesSlides/notesSlide3.xml><?xml version="1.0" encoding="utf-8"?>
-<p:notes xmlns:a="http://schemas.openxmlformats.org/drawingml/2006/main" xmlns:p="http://schemas.openxmlformats.org/presentationml/2006/main" xmlns:r="http://schemas.openxmlformats.org/officeDocument/2006/relationships">
+<p:notes xmlns:a="http://schemas.openxmlformats.org/drawingml/2006/main" xmlns:r="http://schemas.openxmlformats.org/officeDocument/2006/relationships" xmlns:p="http://schemas.openxmlformats.org/presentationml/2006/main">
   <p:cSld>
     <p:spTree>
       <p:nvGrpSpPr>
@@ -697,7 +491,7 @@
         <p:nvSpPr>
           <p:cNvPr id="2" name="Slide Image Placeholder 1"/>
           <p:cNvSpPr>
-            <a:spLocks noGrp="1"/>
+            <a:spLocks noGrp="1" noRot="1" noChangeAspect="1"/>
           </p:cNvSpPr>
           <p:nvPr>
             <p:ph type="sldImg" idx="2"/>
@@ -712,7 +506,7 @@
             <a:spLocks noGrp="1"/>
           </p:cNvSpPr>
           <p:nvPr>
-            <p:ph type="body" idx="3" sz="quarter"/>
+            <p:ph type="body" sz="quarter" idx="3"/>
           </p:nvPr>
         </p:nvSpPr>
         <p:spPr/>
@@ -733,7 +527,7 @@
             <a:spLocks noGrp="1"/>
           </p:cNvSpPr>
           <p:nvPr>
-            <p:ph type="sldNum" idx="5" sz="quarter"/>
+            <p:ph type="sldNum" sz="quarter" idx="5"/>
           </p:nvPr>
         </p:nvSpPr>
         <p:spPr/>
@@ -747,7 +541,7 @@
 </file>
 
 <file path=ppt/notesSlides/notesSlide4.xml><?xml version="1.0" encoding="utf-8"?>
-<p:notes xmlns:a="http://schemas.openxmlformats.org/drawingml/2006/main" xmlns:p="http://schemas.openxmlformats.org/presentationml/2006/main" xmlns:r="http://schemas.openxmlformats.org/officeDocument/2006/relationships">
+<p:notes xmlns:a="http://schemas.openxmlformats.org/drawingml/2006/main" xmlns:r="http://schemas.openxmlformats.org/officeDocument/2006/relationships" xmlns:p="http://schemas.openxmlformats.org/presentationml/2006/main">
   <p:cSld>
     <p:spTree>
       <p:nvGrpSpPr>
@@ -767,7 +561,7 @@
         <p:nvSpPr>
           <p:cNvPr id="2" name="Slide Image Placeholder 1"/>
           <p:cNvSpPr>
-            <a:spLocks noGrp="1"/>
+            <a:spLocks noGrp="1" noRot="1" noChangeAspect="1"/>
           </p:cNvSpPr>
           <p:nvPr>
             <p:ph type="sldImg" idx="2"/>
@@ -782,7 +576,7 @@
             <a:spLocks noGrp="1"/>
           </p:cNvSpPr>
           <p:nvPr>
-            <p:ph type="body" idx="3" sz="quarter"/>
+            <p:ph type="body" sz="quarter" idx="3"/>
           </p:nvPr>
         </p:nvSpPr>
         <p:spPr/>
@@ -803,7 +597,7 @@
             <a:spLocks noGrp="1"/>
           </p:cNvSpPr>
           <p:nvPr>
-            <p:ph type="sldNum" idx="5" sz="quarter"/>
+            <p:ph type="sldNum" sz="quarter" idx="5"/>
           </p:nvPr>
         </p:nvSpPr>
         <p:spPr/>
@@ -817,7 +611,7 @@
 </file>
 
 <file path=ppt/notesSlides/notesSlide5.xml><?xml version="1.0" encoding="utf-8"?>
-<p:notes xmlns:a="http://schemas.openxmlformats.org/drawingml/2006/main" xmlns:p="http://schemas.openxmlformats.org/presentationml/2006/main" xmlns:r="http://schemas.openxmlformats.org/officeDocument/2006/relationships">
+<p:notes xmlns:a="http://schemas.openxmlformats.org/drawingml/2006/main" xmlns:r="http://schemas.openxmlformats.org/officeDocument/2006/relationships" xmlns:p="http://schemas.openxmlformats.org/presentationml/2006/main">
   <p:cSld>
     <p:spTree>
       <p:nvGrpSpPr>
@@ -837,7 +631,7 @@
         <p:nvSpPr>
           <p:cNvPr id="2" name="Slide Image Placeholder 1"/>
           <p:cNvSpPr>
-            <a:spLocks noGrp="1"/>
+            <a:spLocks noGrp="1" noRot="1" noChangeAspect="1"/>
           </p:cNvSpPr>
           <p:nvPr>
             <p:ph type="sldImg" idx="2"/>
@@ -852,7 +646,7 @@
             <a:spLocks noGrp="1"/>
           </p:cNvSpPr>
           <p:nvPr>
-            <p:ph type="body" idx="3" sz="quarter"/>
+            <p:ph type="body" sz="quarter" idx="3"/>
           </p:nvPr>
         </p:nvSpPr>
         <p:spPr/>
@@ -873,7 +667,7 @@
             <a:spLocks noGrp="1"/>
           </p:cNvSpPr>
           <p:nvPr>
-            <p:ph type="sldNum" idx="5" sz="quarter"/>
+            <p:ph type="sldNum" sz="quarter" idx="5"/>
           </p:nvPr>
         </p:nvSpPr>
         <p:spPr/>
@@ -887,7 +681,7 @@
 </file>
 
 <file path=ppt/notesSlides/notesSlide6.xml><?xml version="1.0" encoding="utf-8"?>
-<p:notes xmlns:a="http://schemas.openxmlformats.org/drawingml/2006/main" xmlns:p="http://schemas.openxmlformats.org/presentationml/2006/main" xmlns:r="http://schemas.openxmlformats.org/officeDocument/2006/relationships">
+<p:notes xmlns:a="http://schemas.openxmlformats.org/drawingml/2006/main" xmlns:r="http://schemas.openxmlformats.org/officeDocument/2006/relationships" xmlns:p="http://schemas.openxmlformats.org/presentationml/2006/main">
   <p:cSld>
     <p:spTree>
       <p:nvGrpSpPr>
@@ -907,7 +701,7 @@
         <p:nvSpPr>
           <p:cNvPr id="2" name="Slide Image Placeholder 1"/>
           <p:cNvSpPr>
-            <a:spLocks noGrp="1"/>
+            <a:spLocks noGrp="1" noRot="1" noChangeAspect="1"/>
           </p:cNvSpPr>
           <p:nvPr>
             <p:ph type="sldImg" idx="2"/>
@@ -922,7 +716,7 @@
             <a:spLocks noGrp="1"/>
           </p:cNvSpPr>
           <p:nvPr>
-            <p:ph type="body" idx="3" sz="quarter"/>
+            <p:ph type="body" sz="quarter" idx="3"/>
           </p:nvPr>
         </p:nvSpPr>
         <p:spPr/>
@@ -943,7 +737,7 @@
             <a:spLocks noGrp="1"/>
           </p:cNvSpPr>
           <p:nvPr>
-            <p:ph type="sldNum" idx="5" sz="quarter"/>
+            <p:ph type="sldNum" sz="quarter" idx="5"/>
           </p:nvPr>
         </p:nvSpPr>
         <p:spPr/>
@@ -957,7 +751,7 @@
 </file>
 
 <file path=ppt/notesSlides/notesSlide7.xml><?xml version="1.0" encoding="utf-8"?>
-<p:notes xmlns:a="http://schemas.openxmlformats.org/drawingml/2006/main" xmlns:p="http://schemas.openxmlformats.org/presentationml/2006/main" xmlns:r="http://schemas.openxmlformats.org/officeDocument/2006/relationships">
+<p:notes xmlns:a="http://schemas.openxmlformats.org/drawingml/2006/main" xmlns:r="http://schemas.openxmlformats.org/officeDocument/2006/relationships" xmlns:p="http://schemas.openxmlformats.org/presentationml/2006/main">
   <p:cSld>
     <p:spTree>
       <p:nvGrpSpPr>
@@ -977,7 +771,7 @@
         <p:nvSpPr>
           <p:cNvPr id="2" name="Slide Image Placeholder 1"/>
           <p:cNvSpPr>
-            <a:spLocks noGrp="1"/>
+            <a:spLocks noGrp="1" noRot="1" noChangeAspect="1"/>
           </p:cNvSpPr>
           <p:nvPr>
             <p:ph type="sldImg" idx="2"/>
@@ -992,7 +786,7 @@
             <a:spLocks noGrp="1"/>
           </p:cNvSpPr>
           <p:nvPr>
-            <p:ph type="body" idx="3" sz="quarter"/>
+            <p:ph type="body" sz="quarter" idx="3"/>
           </p:nvPr>
         </p:nvSpPr>
         <p:spPr/>
@@ -1013,7 +807,7 @@
             <a:spLocks noGrp="1"/>
           </p:cNvSpPr>
           <p:nvPr>
-            <p:ph type="sldNum" idx="5" sz="quarter"/>
+            <p:ph type="sldNum" sz="quarter" idx="5"/>
           </p:nvPr>
         </p:nvSpPr>
         <p:spPr/>
@@ -1027,7 +821,7 @@
 </file>
 
 <file path=ppt/notesSlides/notesSlide8.xml><?xml version="1.0" encoding="utf-8"?>
-<p:notes xmlns:a="http://schemas.openxmlformats.org/drawingml/2006/main" xmlns:p="http://schemas.openxmlformats.org/presentationml/2006/main" xmlns:r="http://schemas.openxmlformats.org/officeDocument/2006/relationships">
+<p:notes xmlns:a="http://schemas.openxmlformats.org/drawingml/2006/main" xmlns:r="http://schemas.openxmlformats.org/officeDocument/2006/relationships" xmlns:p="http://schemas.openxmlformats.org/presentationml/2006/main">
   <p:cSld>
     <p:spTree>
       <p:nvGrpSpPr>
@@ -1047,7 +841,7 @@
         <p:nvSpPr>
           <p:cNvPr id="2" name="Slide Image Placeholder 1"/>
           <p:cNvSpPr>
-            <a:spLocks noGrp="1"/>
+            <a:spLocks noGrp="1" noRot="1" noChangeAspect="1"/>
           </p:cNvSpPr>
           <p:nvPr>
             <p:ph type="sldImg" idx="2"/>
@@ -1062,7 +856,7 @@
             <a:spLocks noGrp="1"/>
           </p:cNvSpPr>
           <p:nvPr>
-            <p:ph type="body" idx="3" sz="quarter"/>
+            <p:ph type="body" sz="quarter" idx="3"/>
           </p:nvPr>
         </p:nvSpPr>
         <p:spPr/>
@@ -1083,7 +877,7 @@
             <a:spLocks noGrp="1"/>
           </p:cNvSpPr>
           <p:nvPr>
-            <p:ph type="sldNum" idx="5" sz="quarter"/>
+            <p:ph type="sldNum" sz="quarter" idx="5"/>
           </p:nvPr>
         </p:nvSpPr>
         <p:spPr/>
@@ -1097,7 +891,7 @@
 </file>
 
 <file path=ppt/notesSlides/notesSlide9.xml><?xml version="1.0" encoding="utf-8"?>
-<p:notes xmlns:a="http://schemas.openxmlformats.org/drawingml/2006/main" xmlns:p="http://schemas.openxmlformats.org/presentationml/2006/main" xmlns:r="http://schemas.openxmlformats.org/officeDocument/2006/relationships">
+<p:notes xmlns:a="http://schemas.openxmlformats.org/drawingml/2006/main" xmlns:r="http://schemas.openxmlformats.org/officeDocument/2006/relationships" xmlns:p="http://schemas.openxmlformats.org/presentationml/2006/main">
   <p:cSld>
     <p:spTree>
       <p:nvGrpSpPr>
@@ -1117,7 +911,7 @@
         <p:nvSpPr>
           <p:cNvPr id="2" name="Slide Image Placeholder 1"/>
           <p:cNvSpPr>
-            <a:spLocks noGrp="1"/>
+            <a:spLocks noGrp="1" noRot="1" noChangeAspect="1"/>
           </p:cNvSpPr>
           <p:nvPr>
             <p:ph type="sldImg" idx="2"/>
@@ -1132,7 +926,7 @@
             <a:spLocks noGrp="1"/>
           </p:cNvSpPr>
           <p:nvPr>
-            <p:ph type="body" idx="3" sz="quarter"/>
+            <p:ph type="body" sz="quarter" idx="3"/>
           </p:nvPr>
         </p:nvSpPr>
         <p:spPr/>
@@ -1153,7 +947,7 @@
             <a:spLocks noGrp="1"/>
           </p:cNvSpPr>
           <p:nvPr>
-            <p:ph type="sldNum" idx="5" sz="quarter"/>
+            <p:ph type="sldNum" sz="quarter" idx="5"/>
           </p:nvPr>
         </p:nvSpPr>
         <p:spPr/>
@@ -1204,10 +998,9 @@
           <a:lstStyle/>
           <a:p>
             <a:r>
-              <a:rPr lang="en-US" smtClean="0"/>
+              <a:rPr lang="en-US"/>
               <a:t>Click to edit Master title style</a:t>
             </a:r>
-            <a:endParaRPr lang="en-US"/>
           </a:p>
         </p:txBody>
       </p:sp>
@@ -1323,10 +1116,9 @@
           </a:lstStyle>
           <a:p>
             <a:r>
-              <a:rPr lang="en-US" smtClean="0"/>
+              <a:rPr lang="en-US"/>
               <a:t>Click to edit Master subtitle style</a:t>
             </a:r>
-            <a:endParaRPr lang="en-US"/>
           </a:p>
         </p:txBody>
       </p:sp>
@@ -1347,7 +1139,7 @@
           <a:p>
             <a:fld id="{5BCAD085-E8A6-8845-BD4E-CB4CCA059FC4}" type="datetimeFigureOut">
               <a:rPr lang="en-US" smtClean="0"/>
-              <a:t>1/27/13</a:t>
+              <a:t>9/22/2026</a:t>
             </a:fld>
             <a:endParaRPr lang="en-US"/>
           </a:p>
@@ -1441,10 +1233,9 @@
           <a:lstStyle/>
           <a:p>
             <a:r>
-              <a:rPr lang="en-US" smtClean="0"/>
+              <a:rPr lang="en-US"/>
               <a:t>Click to edit Master title style</a:t>
             </a:r>
-            <a:endParaRPr lang="en-US"/>
           </a:p>
         </p:txBody>
       </p:sp>
@@ -1465,38 +1256,37 @@
           <a:p>
             <a:pPr lvl="0"/>
             <a:r>
-              <a:rPr lang="en-US" smtClean="0"/>
+              <a:rPr lang="en-US"/>
               <a:t>Click to edit Master text styles</a:t>
             </a:r>
           </a:p>
           <a:p>
             <a:pPr lvl="1"/>
             <a:r>
-              <a:rPr lang="en-US" smtClean="0"/>
+              <a:rPr lang="en-US"/>
               <a:t>Second level</a:t>
             </a:r>
           </a:p>
           <a:p>
             <a:pPr lvl="2"/>
             <a:r>
-              <a:rPr lang="en-US" smtClean="0"/>
+              <a:rPr lang="en-US"/>
               <a:t>Third level</a:t>
             </a:r>
           </a:p>
           <a:p>
             <a:pPr lvl="3"/>
             <a:r>
-              <a:rPr lang="en-US" smtClean="0"/>
+              <a:rPr lang="en-US"/>
               <a:t>Fourth level</a:t>
             </a:r>
           </a:p>
           <a:p>
             <a:pPr lvl="4"/>
             <a:r>
-              <a:rPr lang="en-US" smtClean="0"/>
+              <a:rPr lang="en-US"/>
               <a:t>Fifth level</a:t>
             </a:r>
-            <a:endParaRPr lang="en-US"/>
           </a:p>
         </p:txBody>
       </p:sp>
@@ -1517,7 +1307,7 @@
           <a:p>
             <a:fld id="{5BCAD085-E8A6-8845-BD4E-CB4CCA059FC4}" type="datetimeFigureOut">
               <a:rPr lang="en-US" smtClean="0"/>
-              <a:t>1/27/13</a:t>
+              <a:t>9/22/2026</a:t>
             </a:fld>
             <a:endParaRPr lang="en-US"/>
           </a:p>
@@ -1616,10 +1406,9 @@
           <a:lstStyle/>
           <a:p>
             <a:r>
-              <a:rPr lang="en-US" smtClean="0"/>
+              <a:rPr lang="en-US"/>
               <a:t>Click to edit Master title style</a:t>
             </a:r>
-            <a:endParaRPr lang="en-US"/>
           </a:p>
         </p:txBody>
       </p:sp>
@@ -1645,38 +1434,37 @@
           <a:p>
             <a:pPr lvl="0"/>
             <a:r>
-              <a:rPr lang="en-US" smtClean="0"/>
+              <a:rPr lang="en-US"/>
               <a:t>Click to edit Master text styles</a:t>
             </a:r>
           </a:p>
           <a:p>
             <a:pPr lvl="1"/>
             <a:r>
-              <a:rPr lang="en-US" smtClean="0"/>
+              <a:rPr lang="en-US"/>
               <a:t>Second level</a:t>
             </a:r>
           </a:p>
           <a:p>
             <a:pPr lvl="2"/>
             <a:r>
-              <a:rPr lang="en-US" smtClean="0"/>
+              <a:rPr lang="en-US"/>
               <a:t>Third level</a:t>
             </a:r>
           </a:p>
           <a:p>
             <a:pPr lvl="3"/>
             <a:r>
-              <a:rPr lang="en-US" smtClean="0"/>
+              <a:rPr lang="en-US"/>
               <a:t>Fourth level</a:t>
             </a:r>
           </a:p>
           <a:p>
             <a:pPr lvl="4"/>
             <a:r>
-              <a:rPr lang="en-US" smtClean="0"/>
+              <a:rPr lang="en-US"/>
               <a:t>Fifth level</a:t>
             </a:r>
-            <a:endParaRPr lang="en-US"/>
           </a:p>
         </p:txBody>
       </p:sp>
@@ -1697,7 +1485,7 @@
           <a:p>
             <a:fld id="{5BCAD085-E8A6-8845-BD4E-CB4CCA059FC4}" type="datetimeFigureOut">
               <a:rPr lang="en-US" smtClean="0"/>
-              <a:t>1/27/13</a:t>
+              <a:t>9/22/2026</a:t>
             </a:fld>
             <a:endParaRPr lang="en-US"/>
           </a:p>
@@ -1791,10 +1579,9 @@
           <a:lstStyle/>
           <a:p>
             <a:r>
-              <a:rPr lang="en-US" smtClean="0"/>
+              <a:rPr lang="en-US"/>
               <a:t>Click to edit Master title style</a:t>
             </a:r>
-            <a:endParaRPr lang="en-US"/>
           </a:p>
         </p:txBody>
       </p:sp>
@@ -1815,38 +1602,37 @@
           <a:p>
             <a:pPr lvl="0"/>
             <a:r>
-              <a:rPr lang="en-US" smtClean="0"/>
+              <a:rPr lang="en-US"/>
               <a:t>Click to edit Master text styles</a:t>
             </a:r>
           </a:p>
           <a:p>
             <a:pPr lvl="1"/>
             <a:r>
-              <a:rPr lang="en-US" smtClean="0"/>
+              <a:rPr lang="en-US"/>
               <a:t>Second level</a:t>
             </a:r>
           </a:p>
           <a:p>
             <a:pPr lvl="2"/>
             <a:r>
-              <a:rPr lang="en-US" smtClean="0"/>
+              <a:rPr lang="en-US"/>
               <a:t>Third level</a:t>
             </a:r>
           </a:p>
           <a:p>
             <a:pPr lvl="3"/>
             <a:r>
-              <a:rPr lang="en-US" smtClean="0"/>
+              <a:rPr lang="en-US"/>
               <a:t>Fourth level</a:t>
             </a:r>
           </a:p>
           <a:p>
             <a:pPr lvl="4"/>
             <a:r>
-              <a:rPr lang="en-US" smtClean="0"/>
+              <a:rPr lang="en-US"/>
               <a:t>Fifth level</a:t>
             </a:r>
-            <a:endParaRPr lang="en-US"/>
           </a:p>
         </p:txBody>
       </p:sp>
@@ -1867,7 +1653,7 @@
           <a:p>
             <a:fld id="{5BCAD085-E8A6-8845-BD4E-CB4CCA059FC4}" type="datetimeFigureOut">
               <a:rPr lang="en-US" smtClean="0"/>
-              <a:t>1/27/13</a:t>
+              <a:t>9/22/2026</a:t>
             </a:fld>
             <a:endParaRPr lang="en-US"/>
           </a:p>
@@ -1970,10 +1756,9 @@
           </a:lstStyle>
           <a:p>
             <a:r>
-              <a:rPr lang="en-US" smtClean="0"/>
+              <a:rPr lang="en-US"/>
               <a:t>Click to edit Master title style</a:t>
             </a:r>
-            <a:endParaRPr lang="en-US"/>
           </a:p>
         </p:txBody>
       </p:sp>
@@ -2090,7 +1875,7 @@
           <a:p>
             <a:pPr lvl="0"/>
             <a:r>
-              <a:rPr lang="en-US" smtClean="0"/>
+              <a:rPr lang="en-US"/>
               <a:t>Click to edit Master text styles</a:t>
             </a:r>
           </a:p>
@@ -2113,7 +1898,7 @@
           <a:p>
             <a:fld id="{5BCAD085-E8A6-8845-BD4E-CB4CCA059FC4}" type="datetimeFigureOut">
               <a:rPr lang="en-US" smtClean="0"/>
-              <a:t>1/27/13</a:t>
+              <a:t>9/22/2026</a:t>
             </a:fld>
             <a:endParaRPr lang="en-US"/>
           </a:p>
@@ -2207,10 +1992,9 @@
           <a:lstStyle/>
           <a:p>
             <a:r>
-              <a:rPr lang="en-US" smtClean="0"/>
+              <a:rPr lang="en-US"/>
               <a:t>Click to edit Master title style</a:t>
             </a:r>
-            <a:endParaRPr lang="en-US"/>
           </a:p>
         </p:txBody>
       </p:sp>
@@ -2264,38 +2048,37 @@
           <a:p>
             <a:pPr lvl="0"/>
             <a:r>
-              <a:rPr lang="en-US" smtClean="0"/>
+              <a:rPr lang="en-US"/>
               <a:t>Click to edit Master text styles</a:t>
             </a:r>
           </a:p>
           <a:p>
             <a:pPr lvl="1"/>
             <a:r>
-              <a:rPr lang="en-US" smtClean="0"/>
+              <a:rPr lang="en-US"/>
               <a:t>Second level</a:t>
             </a:r>
           </a:p>
           <a:p>
             <a:pPr lvl="2"/>
             <a:r>
-              <a:rPr lang="en-US" smtClean="0"/>
+              <a:rPr lang="en-US"/>
               <a:t>Third level</a:t>
             </a:r>
           </a:p>
           <a:p>
             <a:pPr lvl="3"/>
             <a:r>
-              <a:rPr lang="en-US" smtClean="0"/>
+              <a:rPr lang="en-US"/>
               <a:t>Fourth level</a:t>
             </a:r>
           </a:p>
           <a:p>
             <a:pPr lvl="4"/>
             <a:r>
-              <a:rPr lang="en-US" smtClean="0"/>
+              <a:rPr lang="en-US"/>
               <a:t>Fifth level</a:t>
             </a:r>
-            <a:endParaRPr lang="en-US"/>
           </a:p>
         </p:txBody>
       </p:sp>
@@ -2349,38 +2132,37 @@
           <a:p>
             <a:pPr lvl="0"/>
             <a:r>
-              <a:rPr lang="en-US" smtClean="0"/>
+              <a:rPr lang="en-US"/>
               <a:t>Click to edit Master text styles</a:t>
             </a:r>
           </a:p>
           <a:p>
             <a:pPr lvl="1"/>
             <a:r>
-              <a:rPr lang="en-US" smtClean="0"/>
+              <a:rPr lang="en-US"/>
               <a:t>Second level</a:t>
             </a:r>
           </a:p>
           <a:p>
             <a:pPr lvl="2"/>
             <a:r>
-              <a:rPr lang="en-US" smtClean="0"/>
+              <a:rPr lang="en-US"/>
               <a:t>Third level</a:t>
             </a:r>
           </a:p>
           <a:p>
             <a:pPr lvl="3"/>
             <a:r>
-              <a:rPr lang="en-US" smtClean="0"/>
+              <a:rPr lang="en-US"/>
               <a:t>Fourth level</a:t>
             </a:r>
           </a:p>
           <a:p>
             <a:pPr lvl="4"/>
             <a:r>
-              <a:rPr lang="en-US" smtClean="0"/>
+              <a:rPr lang="en-US"/>
               <a:t>Fifth level</a:t>
             </a:r>
-            <a:endParaRPr lang="en-US"/>
           </a:p>
         </p:txBody>
       </p:sp>
@@ -2401,7 +2183,7 @@
           <a:p>
             <a:fld id="{5BCAD085-E8A6-8845-BD4E-CB4CCA059FC4}" type="datetimeFigureOut">
               <a:rPr lang="en-US" smtClean="0"/>
-              <a:t>1/27/13</a:t>
+              <a:t>9/22/2026</a:t>
             </a:fld>
             <a:endParaRPr lang="en-US"/>
           </a:p>
@@ -2499,10 +2281,9 @@
           </a:lstStyle>
           <a:p>
             <a:r>
-              <a:rPr lang="en-US" smtClean="0"/>
+              <a:rPr lang="en-US"/>
               <a:t>Click to edit Master title style</a:t>
             </a:r>
-            <a:endParaRPr lang="en-US"/>
           </a:p>
         </p:txBody>
       </p:sp>
@@ -2565,7 +2346,7 @@
           <a:p>
             <a:pPr lvl="0"/>
             <a:r>
-              <a:rPr lang="en-US" smtClean="0"/>
+              <a:rPr lang="en-US"/>
               <a:t>Click to edit Master text styles</a:t>
             </a:r>
           </a:p>
@@ -2621,38 +2402,37 @@
           <a:p>
             <a:pPr lvl="0"/>
             <a:r>
-              <a:rPr lang="en-US" smtClean="0"/>
+              <a:rPr lang="en-US"/>
               <a:t>Click to edit Master text styles</a:t>
             </a:r>
           </a:p>
           <a:p>
             <a:pPr lvl="1"/>
             <a:r>
-              <a:rPr lang="en-US" smtClean="0"/>
+              <a:rPr lang="en-US"/>
               <a:t>Second level</a:t>
             </a:r>
           </a:p>
           <a:p>
             <a:pPr lvl="2"/>
             <a:r>
-              <a:rPr lang="en-US" smtClean="0"/>
+              <a:rPr lang="en-US"/>
               <a:t>Third level</a:t>
             </a:r>
           </a:p>
           <a:p>
             <a:pPr lvl="3"/>
             <a:r>
-              <a:rPr lang="en-US" smtClean="0"/>
+              <a:rPr lang="en-US"/>
               <a:t>Fourth level</a:t>
             </a:r>
           </a:p>
           <a:p>
             <a:pPr lvl="4"/>
             <a:r>
-              <a:rPr lang="en-US" smtClean="0"/>
+              <a:rPr lang="en-US"/>
               <a:t>Fifth level</a:t>
             </a:r>
-            <a:endParaRPr lang="en-US"/>
           </a:p>
         </p:txBody>
       </p:sp>
@@ -2715,7 +2495,7 @@
           <a:p>
             <a:pPr lvl="0"/>
             <a:r>
-              <a:rPr lang="en-US" smtClean="0"/>
+              <a:rPr lang="en-US"/>
               <a:t>Click to edit Master text styles</a:t>
             </a:r>
           </a:p>
@@ -2771,38 +2551,37 @@
           <a:p>
             <a:pPr lvl="0"/>
             <a:r>
-              <a:rPr lang="en-US" smtClean="0"/>
+              <a:rPr lang="en-US"/>
               <a:t>Click to edit Master text styles</a:t>
             </a:r>
           </a:p>
           <a:p>
             <a:pPr lvl="1"/>
             <a:r>
-              <a:rPr lang="en-US" smtClean="0"/>
+              <a:rPr lang="en-US"/>
               <a:t>Second level</a:t>
             </a:r>
           </a:p>
           <a:p>
             <a:pPr lvl="2"/>
             <a:r>
-              <a:rPr lang="en-US" smtClean="0"/>
+              <a:rPr lang="en-US"/>
               <a:t>Third level</a:t>
             </a:r>
           </a:p>
           <a:p>
             <a:pPr lvl="3"/>
             <a:r>
-              <a:rPr lang="en-US" smtClean="0"/>
+              <a:rPr lang="en-US"/>
               <a:t>Fourth level</a:t>
             </a:r>
           </a:p>
           <a:p>
             <a:pPr lvl="4"/>
             <a:r>
-              <a:rPr lang="en-US" smtClean="0"/>
+              <a:rPr lang="en-US"/>
               <a:t>Fifth level</a:t>
             </a:r>
-            <a:endParaRPr lang="en-US"/>
           </a:p>
         </p:txBody>
       </p:sp>
@@ -2823,7 +2602,7 @@
           <a:p>
             <a:fld id="{5BCAD085-E8A6-8845-BD4E-CB4CCA059FC4}" type="datetimeFigureOut">
               <a:rPr lang="en-US" smtClean="0"/>
-              <a:t>1/27/13</a:t>
+              <a:t>9/22/2026</a:t>
             </a:fld>
             <a:endParaRPr lang="en-US"/>
           </a:p>
@@ -2917,10 +2696,9 @@
           <a:lstStyle/>
           <a:p>
             <a:r>
-              <a:rPr lang="en-US" smtClean="0"/>
+              <a:rPr lang="en-US"/>
               <a:t>Click to edit Master title style</a:t>
             </a:r>
-            <a:endParaRPr lang="en-US"/>
           </a:p>
         </p:txBody>
       </p:sp>
@@ -2941,7 +2719,7 @@
           <a:p>
             <a:fld id="{5BCAD085-E8A6-8845-BD4E-CB4CCA059FC4}" type="datetimeFigureOut">
               <a:rPr lang="en-US" smtClean="0"/>
-              <a:t>1/27/13</a:t>
+              <a:t>9/22/2026</a:t>
             </a:fld>
             <a:endParaRPr lang="en-US"/>
           </a:p>
@@ -3036,7 +2814,7 @@
           <a:p>
             <a:fld id="{5BCAD085-E8A6-8845-BD4E-CB4CCA059FC4}" type="datetimeFigureOut">
               <a:rPr lang="en-US" smtClean="0"/>
-              <a:t>1/27/13</a:t>
+              <a:t>9/22/2026</a:t>
             </a:fld>
             <a:endParaRPr lang="en-US"/>
           </a:p>
@@ -3139,10 +2917,9 @@
           </a:lstStyle>
           <a:p>
             <a:r>
-              <a:rPr lang="en-US" smtClean="0"/>
+              <a:rPr lang="en-US"/>
               <a:t>Click to edit Master title style</a:t>
             </a:r>
-            <a:endParaRPr lang="en-US"/>
           </a:p>
         </p:txBody>
       </p:sp>
@@ -3196,38 +2973,37 @@
           <a:p>
             <a:pPr lvl="0"/>
             <a:r>
-              <a:rPr lang="en-US" smtClean="0"/>
+              <a:rPr lang="en-US"/>
               <a:t>Click to edit Master text styles</a:t>
             </a:r>
           </a:p>
           <a:p>
             <a:pPr lvl="1"/>
             <a:r>
-              <a:rPr lang="en-US" smtClean="0"/>
+              <a:rPr lang="en-US"/>
               <a:t>Second level</a:t>
             </a:r>
           </a:p>
           <a:p>
             <a:pPr lvl="2"/>
             <a:r>
-              <a:rPr lang="en-US" smtClean="0"/>
+              <a:rPr lang="en-US"/>
               <a:t>Third level</a:t>
             </a:r>
           </a:p>
           <a:p>
             <a:pPr lvl="3"/>
             <a:r>
-              <a:rPr lang="en-US" smtClean="0"/>
+              <a:rPr lang="en-US"/>
               <a:t>Fourth level</a:t>
             </a:r>
           </a:p>
           <a:p>
             <a:pPr lvl="4"/>
             <a:r>
-              <a:rPr lang="en-US" smtClean="0"/>
+              <a:rPr lang="en-US"/>
               <a:t>Fifth level</a:t>
             </a:r>
-            <a:endParaRPr lang="en-US"/>
           </a:p>
         </p:txBody>
       </p:sp>
@@ -3290,7 +3066,7 @@
           <a:p>
             <a:pPr lvl="0"/>
             <a:r>
-              <a:rPr lang="en-US" smtClean="0"/>
+              <a:rPr lang="en-US"/>
               <a:t>Click to edit Master text styles</a:t>
             </a:r>
           </a:p>
@@ -3313,7 +3089,7 @@
           <a:p>
             <a:fld id="{5BCAD085-E8A6-8845-BD4E-CB4CCA059FC4}" type="datetimeFigureOut">
               <a:rPr lang="en-US" smtClean="0"/>
-              <a:t>1/27/13</a:t>
+              <a:t>9/22/2026</a:t>
             </a:fld>
             <a:endParaRPr lang="en-US"/>
           </a:p>
@@ -3416,10 +3192,9 @@
           </a:lstStyle>
           <a:p>
             <a:r>
-              <a:rPr lang="en-US" smtClean="0"/>
+              <a:rPr lang="en-US"/>
               <a:t>Click to edit Master title style</a:t>
             </a:r>
-            <a:endParaRPr lang="en-US"/>
           </a:p>
         </p:txBody>
       </p:sp>
@@ -3543,7 +3318,7 @@
           <a:p>
             <a:pPr lvl="0"/>
             <a:r>
-              <a:rPr lang="en-US" smtClean="0"/>
+              <a:rPr lang="en-US"/>
               <a:t>Click to edit Master text styles</a:t>
             </a:r>
           </a:p>
@@ -3566,7 +3341,7 @@
           <a:p>
             <a:fld id="{5BCAD085-E8A6-8845-BD4E-CB4CCA059FC4}" type="datetimeFigureOut">
               <a:rPr lang="en-US" smtClean="0"/>
-              <a:t>1/27/13</a:t>
+              <a:t>9/22/2026</a:t>
             </a:fld>
             <a:endParaRPr lang="en-US"/>
           </a:p>
@@ -3675,10 +3450,9 @@
           <a:lstStyle/>
           <a:p>
             <a:r>
-              <a:rPr lang="en-US" smtClean="0"/>
+              <a:rPr lang="en-US"/>
               <a:t>Click to edit Master title style</a:t>
             </a:r>
-            <a:endParaRPr lang="en-US"/>
           </a:p>
         </p:txBody>
       </p:sp>
@@ -3709,38 +3483,37 @@
           <a:p>
             <a:pPr lvl="0"/>
             <a:r>
-              <a:rPr lang="en-US" smtClean="0"/>
+              <a:rPr lang="en-US"/>
               <a:t>Click to edit Master text styles</a:t>
             </a:r>
           </a:p>
           <a:p>
             <a:pPr lvl="1"/>
             <a:r>
-              <a:rPr lang="en-US" smtClean="0"/>
+              <a:rPr lang="en-US"/>
               <a:t>Second level</a:t>
             </a:r>
           </a:p>
           <a:p>
             <a:pPr lvl="2"/>
             <a:r>
-              <a:rPr lang="en-US" smtClean="0"/>
+              <a:rPr lang="en-US"/>
               <a:t>Third level</a:t>
             </a:r>
           </a:p>
           <a:p>
             <a:pPr lvl="3"/>
             <a:r>
-              <a:rPr lang="en-US" smtClean="0"/>
+              <a:rPr lang="en-US"/>
               <a:t>Fourth level</a:t>
             </a:r>
           </a:p>
           <a:p>
             <a:pPr lvl="4"/>
             <a:r>
-              <a:rPr lang="en-US" smtClean="0"/>
+              <a:rPr lang="en-US"/>
               <a:t>Fifth level</a:t>
             </a:r>
-            <a:endParaRPr lang="en-US"/>
           </a:p>
         </p:txBody>
       </p:sp>
@@ -3779,7 +3552,7 @@
           <a:p>
             <a:fld id="{5BCAD085-E8A6-8845-BD4E-CB4CCA059FC4}" type="datetimeFigureOut">
               <a:rPr lang="en-US" smtClean="0"/>
-              <a:t>1/27/13</a:t>
+              <a:t>9/22/2026</a:t>
             </a:fld>
             <a:endParaRPr lang="en-US"/>
           </a:p>
@@ -4138,7 +3911,7 @@
 </file>
 
 <file path=ppt/slides/slide1.xml><?xml version="1.0" encoding="utf-8"?>
-<p:sld xmlns:a="http://schemas.openxmlformats.org/drawingml/2006/main" xmlns:p="http://schemas.openxmlformats.org/presentationml/2006/main" xmlns:r="http://schemas.openxmlformats.org/officeDocument/2006/relationships">
+<p:sld xmlns:a="http://schemas.openxmlformats.org/drawingml/2006/main" xmlns:r="http://schemas.openxmlformats.org/officeDocument/2006/relationships" xmlns:p="http://schemas.openxmlformats.org/presentationml/2006/main">
   <p:cSld>
     <p:spTree>
       <p:nvGrpSpPr>
@@ -4146,7 +3919,14 @@
         <p:cNvGrpSpPr/>
         <p:nvPr/>
       </p:nvGrpSpPr>
-      <p:grpSpPr/>
+      <p:grpSpPr>
+        <a:xfrm>
+          <a:off x="0" y="0"/>
+          <a:ext cx="0" cy="0"/>
+          <a:chOff x="0" y="0"/>
+          <a:chExt cx="0" cy="0"/>
+        </a:xfrm>
+      </p:grpSpPr>
       <p:sp>
         <p:nvSpPr>
           <p:cNvPr id="2" name="TextBox 1"/>
@@ -4262,7 +4042,7 @@
 </file>
 
 <file path=ppt/slides/slide10.xml><?xml version="1.0" encoding="utf-8"?>
-<p:sld xmlns:a="http://schemas.openxmlformats.org/drawingml/2006/main" xmlns:p="http://schemas.openxmlformats.org/presentationml/2006/main" xmlns:r="http://schemas.openxmlformats.org/officeDocument/2006/relationships">
+<p:sld xmlns:a="http://schemas.openxmlformats.org/drawingml/2006/main" xmlns:r="http://schemas.openxmlformats.org/officeDocument/2006/relationships" xmlns:p="http://schemas.openxmlformats.org/presentationml/2006/main">
   <p:cSld>
     <p:spTree>
       <p:nvGrpSpPr>
@@ -4270,7 +4050,14 @@
         <p:cNvGrpSpPr/>
         <p:nvPr/>
       </p:nvGrpSpPr>
-      <p:grpSpPr/>
+      <p:grpSpPr>
+        <a:xfrm>
+          <a:off x="0" y="0"/>
+          <a:ext cx="0" cy="0"/>
+          <a:chOff x="0" y="0"/>
+          <a:chExt cx="0" cy="0"/>
+        </a:xfrm>
+      </p:grpSpPr>
       <p:sp>
         <p:nvSpPr>
           <p:cNvPr id="2" name="TextBox 1"/>
@@ -4350,6 +4137,7 @@
           <a:lstStyle/>
           <a:p>
             <a:pPr algn="ctr"/>
+            <a:endParaRPr/>
           </a:p>
         </p:txBody>
       </p:sp>
@@ -4475,7 +4263,7 @@
         <p:spPr>
           <a:xfrm>
             <a:off x="4823460" y="1078992"/>
-            <a:ext cx="3817620" cy="3744468"/>
+            <a:ext cx="3817620" cy="353943"/>
           </a:xfrm>
           <a:prstGeom prst="rect">
             <a:avLst/>
@@ -4501,66 +4289,11 @@
               </a:rPr>
               <a:t>Liping Yin</a:t>
             </a:r>
-          </a:p>
-          <a:p>
-            <a:pPr>
-              <a:spcAft>
-                <a:spcPts val="800"/>
-              </a:spcAft>
-            </a:pPr>
-            <a:r>
-              <a:rPr sz="1200" b="0">
-                <a:solidFill>
-                  <a:srgbClr val="262626"/>
-                </a:solidFill>
-              </a:rPr>
-              <a:t>&lt;&lt;LIPING: programme / affiliation&gt;&gt;</a:t>
-            </a:r>
-          </a:p>
-          <a:p>
-            <a:pPr>
-              <a:spcAft>
-                <a:spcPts val="800"/>
-              </a:spcAft>
-            </a:pPr>
-            <a:r>
-              <a:rPr sz="1200" b="0">
-                <a:solidFill>
-                  <a:srgbClr val="262626"/>
-                </a:solidFill>
-              </a:rPr>
-              <a:t>&lt;&lt;LIPING: what you did on this project&gt;&gt;</a:t>
-            </a:r>
-          </a:p>
-          <a:p>
-            <a:pPr>
-              <a:spcAft>
-                <a:spcPts val="800"/>
-              </a:spcAft>
-            </a:pPr>
-            <a:r>
-              <a:rPr sz="1200" b="0">
-                <a:solidFill>
-                  <a:srgbClr val="262626"/>
-                </a:solidFill>
-              </a:rPr>
-              <a:t>&lt;&lt;LIPING: one line of background, or delete this row&gt;&gt;</a:t>
-            </a:r>
-          </a:p>
-          <a:p>
-            <a:pPr>
-              <a:spcAft>
-                <a:spcPts val="800"/>
-              </a:spcAft>
-            </a:pPr>
-            <a:r>
-              <a:rPr sz="1200" b="0">
-                <a:solidFill>
-                  <a:srgbClr val="262626"/>
-                </a:solidFill>
-              </a:rPr>
-              <a:t>&lt;&lt;LIPING: contact&gt;&gt;</a:t>
-            </a:r>
+            <a:endParaRPr sz="1700" b="1" dirty="0">
+              <a:solidFill>
+                <a:srgbClr val="1F4E79"/>
+              </a:solidFill>
+            </a:endParaRPr>
           </a:p>
         </p:txBody>
       </p:sp>
@@ -4573,7 +4306,7 @@
 </file>
 
 <file path=ppt/slides/slide2.xml><?xml version="1.0" encoding="utf-8"?>
-<p:sld xmlns:a="http://schemas.openxmlformats.org/drawingml/2006/main" xmlns:p="http://schemas.openxmlformats.org/presentationml/2006/main" xmlns:r="http://schemas.openxmlformats.org/officeDocument/2006/relationships">
+<p:sld xmlns:a="http://schemas.openxmlformats.org/drawingml/2006/main" xmlns:r="http://schemas.openxmlformats.org/officeDocument/2006/relationships" xmlns:p="http://schemas.openxmlformats.org/presentationml/2006/main">
   <p:cSld>
     <p:spTree>
       <p:nvGrpSpPr>
@@ -4581,7 +4314,14 @@
         <p:cNvGrpSpPr/>
         <p:nvPr/>
       </p:nvGrpSpPr>
-      <p:grpSpPr/>
+      <p:grpSpPr>
+        <a:xfrm>
+          <a:off x="0" y="0"/>
+          <a:ext cx="0" cy="0"/>
+          <a:chOff x="0" y="0"/>
+          <a:chExt cx="0" cy="0"/>
+        </a:xfrm>
+      </p:grpSpPr>
       <p:sp>
         <p:nvSpPr>
           <p:cNvPr id="2" name="TextBox 1"/>
@@ -4697,7 +4437,7 @@
 </file>
 
 <file path=ppt/slides/slide3.xml><?xml version="1.0" encoding="utf-8"?>
-<p:sld xmlns:a="http://schemas.openxmlformats.org/drawingml/2006/main" xmlns:p="http://schemas.openxmlformats.org/presentationml/2006/main" xmlns:r="http://schemas.openxmlformats.org/officeDocument/2006/relationships">
+<p:sld xmlns:a="http://schemas.openxmlformats.org/drawingml/2006/main" xmlns:r="http://schemas.openxmlformats.org/officeDocument/2006/relationships" xmlns:p="http://schemas.openxmlformats.org/presentationml/2006/main">
   <p:cSld>
     <p:spTree>
       <p:nvGrpSpPr>
@@ -4705,7 +4445,14 @@
         <p:cNvGrpSpPr/>
         <p:nvPr/>
       </p:nvGrpSpPr>
-      <p:grpSpPr/>
+      <p:grpSpPr>
+        <a:xfrm>
+          <a:off x="0" y="0"/>
+          <a:ext cx="0" cy="0"/>
+          <a:chOff x="0" y="0"/>
+          <a:chExt cx="0" cy="0"/>
+        </a:xfrm>
+      </p:grpSpPr>
       <p:sp>
         <p:nvSpPr>
           <p:cNvPr id="2" name="TextBox 1"/>
@@ -4852,7 +4599,7 @@
 </file>
 
 <file path=ppt/slides/slide4.xml><?xml version="1.0" encoding="utf-8"?>
-<p:sld xmlns:a="http://schemas.openxmlformats.org/drawingml/2006/main" xmlns:p="http://schemas.openxmlformats.org/presentationml/2006/main" xmlns:r="http://schemas.openxmlformats.org/officeDocument/2006/relationships">
+<p:sld xmlns:a="http://schemas.openxmlformats.org/drawingml/2006/main" xmlns:r="http://schemas.openxmlformats.org/officeDocument/2006/relationships" xmlns:p="http://schemas.openxmlformats.org/presentationml/2006/main">
   <p:cSld>
     <p:spTree>
       <p:nvGrpSpPr>
@@ -4860,7 +4607,14 @@
         <p:cNvGrpSpPr/>
         <p:nvPr/>
       </p:nvGrpSpPr>
-      <p:grpSpPr/>
+      <p:grpSpPr>
+        <a:xfrm>
+          <a:off x="0" y="0"/>
+          <a:ext cx="0" cy="0"/>
+          <a:chOff x="0" y="0"/>
+          <a:chExt cx="0" cy="0"/>
+        </a:xfrm>
+      </p:grpSpPr>
       <p:sp>
         <p:nvSpPr>
           <p:cNvPr id="2" name="TextBox 1"/>
@@ -5007,7 +4761,7 @@
 </file>
 
 <file path=ppt/slides/slide5.xml><?xml version="1.0" encoding="utf-8"?>
-<p:sld xmlns:a="http://schemas.openxmlformats.org/drawingml/2006/main" xmlns:p="http://schemas.openxmlformats.org/presentationml/2006/main" xmlns:r="http://schemas.openxmlformats.org/officeDocument/2006/relationships">
+<p:sld xmlns:a="http://schemas.openxmlformats.org/drawingml/2006/main" xmlns:r="http://schemas.openxmlformats.org/officeDocument/2006/relationships" xmlns:p="http://schemas.openxmlformats.org/presentationml/2006/main">
   <p:cSld>
     <p:spTree>
       <p:nvGrpSpPr>
@@ -5015,7 +4769,14 @@
         <p:cNvGrpSpPr/>
         <p:nvPr/>
       </p:nvGrpSpPr>
-      <p:grpSpPr/>
+      <p:grpSpPr>
+        <a:xfrm>
+          <a:off x="0" y="0"/>
+          <a:ext cx="0" cy="0"/>
+          <a:chOff x="0" y="0"/>
+          <a:chExt cx="0" cy="0"/>
+        </a:xfrm>
+      </p:grpSpPr>
       <p:sp>
         <p:nvSpPr>
           <p:cNvPr id="2" name="TextBox 1"/>
@@ -5146,7 +4907,7 @@
 </file>
 
 <file path=ppt/slides/slide6.xml><?xml version="1.0" encoding="utf-8"?>
-<p:sld xmlns:a="http://schemas.openxmlformats.org/drawingml/2006/main" xmlns:p="http://schemas.openxmlformats.org/presentationml/2006/main" xmlns:r="http://schemas.openxmlformats.org/officeDocument/2006/relationships">
+<p:sld xmlns:a="http://schemas.openxmlformats.org/drawingml/2006/main" xmlns:r="http://schemas.openxmlformats.org/officeDocument/2006/relationships" xmlns:p="http://schemas.openxmlformats.org/presentationml/2006/main">
   <p:cSld>
     <p:spTree>
       <p:nvGrpSpPr>
@@ -5154,7 +4915,14 @@
         <p:cNvGrpSpPr/>
         <p:nvPr/>
       </p:nvGrpSpPr>
-      <p:grpSpPr/>
+      <p:grpSpPr>
+        <a:xfrm>
+          <a:off x="0" y="0"/>
+          <a:ext cx="0" cy="0"/>
+          <a:chOff x="0" y="0"/>
+          <a:chExt cx="0" cy="0"/>
+        </a:xfrm>
+      </p:grpSpPr>
       <p:sp>
         <p:nvSpPr>
           <p:cNvPr id="2" name="TextBox 1"/>
@@ -5230,7 +4998,7 @@
           </a:fontRef>
         </p:style>
         <p:txBody>
-          <a:bodyPr rtlCol="0" anchor="ctr" wrap="none"/>
+          <a:bodyPr wrap="none" rtlCol="0" anchor="ctr"/>
           <a:lstStyle/>
           <a:p>
             <a:pPr algn="ctr">
@@ -5324,7 +5092,7 @@
           </a:fontRef>
         </p:style>
         <p:txBody>
-          <a:bodyPr rtlCol="0" anchor="ctr" wrap="none"/>
+          <a:bodyPr wrap="none" rtlCol="0" anchor="ctr"/>
           <a:lstStyle/>
           <a:p>
             <a:pPr algn="ctr">
@@ -5418,7 +5186,7 @@
           </a:fontRef>
         </p:style>
         <p:txBody>
-          <a:bodyPr rtlCol="0" anchor="ctr" wrap="none"/>
+          <a:bodyPr wrap="none" rtlCol="0" anchor="ctr"/>
           <a:lstStyle/>
           <a:p>
             <a:pPr algn="ctr">
@@ -5561,7 +5329,7 @@
 </file>
 
 <file path=ppt/slides/slide7.xml><?xml version="1.0" encoding="utf-8"?>
-<p:sld xmlns:a="http://schemas.openxmlformats.org/drawingml/2006/main" xmlns:p="http://schemas.openxmlformats.org/presentationml/2006/main" xmlns:r="http://schemas.openxmlformats.org/officeDocument/2006/relationships">
+<p:sld xmlns:a="http://schemas.openxmlformats.org/drawingml/2006/main" xmlns:r="http://schemas.openxmlformats.org/officeDocument/2006/relationships" xmlns:p="http://schemas.openxmlformats.org/presentationml/2006/main">
   <p:cSld>
     <p:spTree>
       <p:nvGrpSpPr>
@@ -5569,7 +5337,14 @@
         <p:cNvGrpSpPr/>
         <p:nvPr/>
       </p:nvGrpSpPr>
-      <p:grpSpPr/>
+      <p:grpSpPr>
+        <a:xfrm>
+          <a:off x="0" y="0"/>
+          <a:ext cx="0" cy="0"/>
+          <a:chOff x="0" y="0"/>
+          <a:chExt cx="0" cy="0"/>
+        </a:xfrm>
+      </p:grpSpPr>
       <p:sp>
         <p:nvSpPr>
           <p:cNvPr id="2" name="TextBox 1"/>
@@ -5627,11 +5402,41 @@
                 <a:tableStyleId>{5C22544A-7EE6-4342-B048-85BDC9FD1C3A}</a:tableStyleId>
               </a:tblPr>
               <a:tblGrid>
-                <a:gridCol w="347472"/>
-                <a:gridCol w="2788920"/>
-                <a:gridCol w="960120"/>
-                <a:gridCol w="1143000"/>
-                <a:gridCol w="2898648"/>
+                <a:gridCol w="347472">
+                  <a:extLst>
+                    <a:ext uri="{9D8B030D-6E8A-4147-A177-3AD203B41FA5}">
+                      <a16:colId xmlns:a16="http://schemas.microsoft.com/office/drawing/2014/main" val="20000"/>
+                    </a:ext>
+                  </a:extLst>
+                </a:gridCol>
+                <a:gridCol w="2788920">
+                  <a:extLst>
+                    <a:ext uri="{9D8B030D-6E8A-4147-A177-3AD203B41FA5}">
+                      <a16:colId xmlns:a16="http://schemas.microsoft.com/office/drawing/2014/main" val="20001"/>
+                    </a:ext>
+                  </a:extLst>
+                </a:gridCol>
+                <a:gridCol w="960120">
+                  <a:extLst>
+                    <a:ext uri="{9D8B030D-6E8A-4147-A177-3AD203B41FA5}">
+                      <a16:colId xmlns:a16="http://schemas.microsoft.com/office/drawing/2014/main" val="20002"/>
+                    </a:ext>
+                  </a:extLst>
+                </a:gridCol>
+                <a:gridCol w="1143000">
+                  <a:extLst>
+                    <a:ext uri="{9D8B030D-6E8A-4147-A177-3AD203B41FA5}">
+                      <a16:colId xmlns:a16="http://schemas.microsoft.com/office/drawing/2014/main" val="20003"/>
+                    </a:ext>
+                  </a:extLst>
+                </a:gridCol>
+                <a:gridCol w="2898648">
+                  <a:extLst>
+                    <a:ext uri="{9D8B030D-6E8A-4147-A177-3AD203B41FA5}">
+                      <a16:colId xmlns:a16="http://schemas.microsoft.com/office/drawing/2014/main" val="20004"/>
+                    </a:ext>
+                  </a:extLst>
+                </a:gridCol>
               </a:tblGrid>
               <a:tr h="214884">
                 <a:tc>
@@ -5724,6 +5529,11 @@
                   </a:txBody>
                   <a:tcPr marT="12700" marB="12700"/>
                 </a:tc>
+                <a:extLst>
+                  <a:ext uri="{0D108BD9-81ED-4DB2-BD59-A6C34878D82A}">
+                    <a16:rowId xmlns:a16="http://schemas.microsoft.com/office/drawing/2014/main" val="10000"/>
+                  </a:ext>
+                </a:extLst>
               </a:tr>
               <a:tr h="214884">
                 <a:tc>
@@ -5816,6 +5626,11 @@
                   </a:txBody>
                   <a:tcPr marT="12700" marB="12700"/>
                 </a:tc>
+                <a:extLst>
+                  <a:ext uri="{0D108BD9-81ED-4DB2-BD59-A6C34878D82A}">
+                    <a16:rowId xmlns:a16="http://schemas.microsoft.com/office/drawing/2014/main" val="10001"/>
+                  </a:ext>
+                </a:extLst>
               </a:tr>
               <a:tr h="214884">
                 <a:tc>
@@ -5908,6 +5723,11 @@
                   </a:txBody>
                   <a:tcPr marT="12700" marB="12700"/>
                 </a:tc>
+                <a:extLst>
+                  <a:ext uri="{0D108BD9-81ED-4DB2-BD59-A6C34878D82A}">
+                    <a16:rowId xmlns:a16="http://schemas.microsoft.com/office/drawing/2014/main" val="10002"/>
+                  </a:ext>
+                </a:extLst>
               </a:tr>
               <a:tr h="214884">
                 <a:tc>
@@ -6000,6 +5820,11 @@
                   </a:txBody>
                   <a:tcPr marT="12700" marB="12700"/>
                 </a:tc>
+                <a:extLst>
+                  <a:ext uri="{0D108BD9-81ED-4DB2-BD59-A6C34878D82A}">
+                    <a16:rowId xmlns:a16="http://schemas.microsoft.com/office/drawing/2014/main" val="10003"/>
+                  </a:ext>
+                </a:extLst>
               </a:tr>
               <a:tr h="214884">
                 <a:tc>
@@ -6092,6 +5917,11 @@
                   </a:txBody>
                   <a:tcPr marT="12700" marB="12700"/>
                 </a:tc>
+                <a:extLst>
+                  <a:ext uri="{0D108BD9-81ED-4DB2-BD59-A6C34878D82A}">
+                    <a16:rowId xmlns:a16="http://schemas.microsoft.com/office/drawing/2014/main" val="10004"/>
+                  </a:ext>
+                </a:extLst>
               </a:tr>
               <a:tr h="214884">
                 <a:tc>
@@ -6184,6 +6014,11 @@
                   </a:txBody>
                   <a:tcPr marT="12700" marB="12700"/>
                 </a:tc>
+                <a:extLst>
+                  <a:ext uri="{0D108BD9-81ED-4DB2-BD59-A6C34878D82A}">
+                    <a16:rowId xmlns:a16="http://schemas.microsoft.com/office/drawing/2014/main" val="10005"/>
+                  </a:ext>
+                </a:extLst>
               </a:tr>
               <a:tr h="214884">
                 <a:tc>
@@ -6276,6 +6111,11 @@
                   </a:txBody>
                   <a:tcPr marT="12700" marB="12700"/>
                 </a:tc>
+                <a:extLst>
+                  <a:ext uri="{0D108BD9-81ED-4DB2-BD59-A6C34878D82A}">
+                    <a16:rowId xmlns:a16="http://schemas.microsoft.com/office/drawing/2014/main" val="10006"/>
+                  </a:ext>
+                </a:extLst>
               </a:tr>
               <a:tr h="214884">
                 <a:tc>
@@ -6368,6 +6208,11 @@
                   </a:txBody>
                   <a:tcPr marT="12700" marB="12700"/>
                 </a:tc>
+                <a:extLst>
+                  <a:ext uri="{0D108BD9-81ED-4DB2-BD59-A6C34878D82A}">
+                    <a16:rowId xmlns:a16="http://schemas.microsoft.com/office/drawing/2014/main" val="10007"/>
+                  </a:ext>
+                </a:extLst>
               </a:tr>
               <a:tr h="214884">
                 <a:tc>
@@ -6460,6 +6305,11 @@
                   </a:txBody>
                   <a:tcPr marT="12700" marB="12700"/>
                 </a:tc>
+                <a:extLst>
+                  <a:ext uri="{0D108BD9-81ED-4DB2-BD59-A6C34878D82A}">
+                    <a16:rowId xmlns:a16="http://schemas.microsoft.com/office/drawing/2014/main" val="10008"/>
+                  </a:ext>
+                </a:extLst>
               </a:tr>
               <a:tr h="214884">
                 <a:tc>
@@ -6552,6 +6402,11 @@
                   </a:txBody>
                   <a:tcPr marT="12700" marB="12700"/>
                 </a:tc>
+                <a:extLst>
+                  <a:ext uri="{0D108BD9-81ED-4DB2-BD59-A6C34878D82A}">
+                    <a16:rowId xmlns:a16="http://schemas.microsoft.com/office/drawing/2014/main" val="10009"/>
+                  </a:ext>
+                </a:extLst>
               </a:tr>
               <a:tr h="214884">
                 <a:tc>
@@ -6644,6 +6499,11 @@
                   </a:txBody>
                   <a:tcPr marT="12700" marB="12700"/>
                 </a:tc>
+                <a:extLst>
+                  <a:ext uri="{0D108BD9-81ED-4DB2-BD59-A6C34878D82A}">
+                    <a16:rowId xmlns:a16="http://schemas.microsoft.com/office/drawing/2014/main" val="10010"/>
+                  </a:ext>
+                </a:extLst>
               </a:tr>
               <a:tr h="214884">
                 <a:tc>
@@ -6736,6 +6596,11 @@
                   </a:txBody>
                   <a:tcPr marT="12700" marB="12700"/>
                 </a:tc>
+                <a:extLst>
+                  <a:ext uri="{0D108BD9-81ED-4DB2-BD59-A6C34878D82A}">
+                    <a16:rowId xmlns:a16="http://schemas.microsoft.com/office/drawing/2014/main" val="10011"/>
+                  </a:ext>
+                </a:extLst>
               </a:tr>
               <a:tr h="214884">
                 <a:tc>
@@ -6828,6 +6693,11 @@
                   </a:txBody>
                   <a:tcPr marT="12700" marB="12700"/>
                 </a:tc>
+                <a:extLst>
+                  <a:ext uri="{0D108BD9-81ED-4DB2-BD59-A6C34878D82A}">
+                    <a16:rowId xmlns:a16="http://schemas.microsoft.com/office/drawing/2014/main" val="10012"/>
+                  </a:ext>
+                </a:extLst>
               </a:tr>
               <a:tr h="214884">
                 <a:tc>
@@ -6920,6 +6790,11 @@
                   </a:txBody>
                   <a:tcPr marT="12700" marB="12700"/>
                 </a:tc>
+                <a:extLst>
+                  <a:ext uri="{0D108BD9-81ED-4DB2-BD59-A6C34878D82A}">
+                    <a16:rowId xmlns:a16="http://schemas.microsoft.com/office/drawing/2014/main" val="10013"/>
+                  </a:ext>
+                </a:extLst>
               </a:tr>
               <a:tr h="214884">
                 <a:tc>
@@ -6928,6 +6803,7 @@
                     <a:lstStyle/>
                     <a:p>
                       <a:pPr algn="r"/>
+                      <a:endParaRPr/>
                     </a:p>
                   </a:txBody>
                   <a:tcPr marT="12700" marB="12700"/>
@@ -6992,10 +6868,16 @@
                     <a:lstStyle/>
                     <a:p>
                       <a:pPr algn="l"/>
+                      <a:endParaRPr/>
                     </a:p>
                   </a:txBody>
                   <a:tcPr marT="12700" marB="12700"/>
                 </a:tc>
+                <a:extLst>
+                  <a:ext uri="{0D108BD9-81ED-4DB2-BD59-A6C34878D82A}">
+                    <a16:rowId xmlns:a16="http://schemas.microsoft.com/office/drawing/2014/main" val="10014"/>
+                  </a:ext>
+                </a:extLst>
               </a:tr>
             </a:tbl>
           </a:graphicData>
@@ -7010,7 +6892,7 @@
 </file>
 
 <file path=ppt/slides/slide8.xml><?xml version="1.0" encoding="utf-8"?>
-<p:sld xmlns:a="http://schemas.openxmlformats.org/drawingml/2006/main" xmlns:p="http://schemas.openxmlformats.org/presentationml/2006/main" xmlns:r="http://schemas.openxmlformats.org/officeDocument/2006/relationships">
+<p:sld xmlns:a="http://schemas.openxmlformats.org/drawingml/2006/main" xmlns:r="http://schemas.openxmlformats.org/officeDocument/2006/relationships" xmlns:p="http://schemas.openxmlformats.org/presentationml/2006/main">
   <p:cSld>
     <p:spTree>
       <p:nvGrpSpPr>
@@ -7018,7 +6900,14 @@
         <p:cNvGrpSpPr/>
         <p:nvPr/>
       </p:nvGrpSpPr>
-      <p:grpSpPr/>
+      <p:grpSpPr>
+        <a:xfrm>
+          <a:off x="0" y="0"/>
+          <a:ext cx="0" cy="0"/>
+          <a:chOff x="0" y="0"/>
+          <a:chExt cx="0" cy="0"/>
+        </a:xfrm>
+      </p:grpSpPr>
       <p:sp>
         <p:nvSpPr>
           <p:cNvPr id="2" name="TextBox 1"/>
@@ -7220,7 +7109,7 @@
 </file>
 
 <file path=ppt/slides/slide9.xml><?xml version="1.0" encoding="utf-8"?>
-<p:sld xmlns:a="http://schemas.openxmlformats.org/drawingml/2006/main" xmlns:p="http://schemas.openxmlformats.org/presentationml/2006/main" xmlns:r="http://schemas.openxmlformats.org/officeDocument/2006/relationships">
+<p:sld xmlns:a="http://schemas.openxmlformats.org/drawingml/2006/main" xmlns:r="http://schemas.openxmlformats.org/officeDocument/2006/relationships" xmlns:p="http://schemas.openxmlformats.org/presentationml/2006/main">
   <p:cSld>
     <p:spTree>
       <p:nvGrpSpPr>
@@ -7228,7 +7117,14 @@
         <p:cNvGrpSpPr/>
         <p:nvPr/>
       </p:nvGrpSpPr>
-      <p:grpSpPr/>
+      <p:grpSpPr>
+        <a:xfrm>
+          <a:off x="0" y="0"/>
+          <a:ext cx="0" cy="0"/>
+          <a:chOff x="0" y="0"/>
+          <a:chExt cx="0" cy="0"/>
+        </a:xfrm>
+      </p:grpSpPr>
       <p:sp>
         <p:nvSpPr>
           <p:cNvPr id="2" name="TextBox 1"/>
@@ -7753,44 +7649,44 @@
         <a:sysClr val="window" lastClr="FFFFFF"/>
       </a:lt1>
       <a:dk2>
-        <a:srgbClr val="1F497D"/>
+        <a:srgbClr val="44546A"/>
       </a:dk2>
       <a:lt2>
-        <a:srgbClr val="EEECE1"/>
+        <a:srgbClr val="E7E6E6"/>
       </a:lt2>
       <a:accent1>
-        <a:srgbClr val="4F81BD"/>
+        <a:srgbClr val="4472C4"/>
       </a:accent1>
       <a:accent2>
-        <a:srgbClr val="C0504D"/>
+        <a:srgbClr val="ED7D31"/>
       </a:accent2>
       <a:accent3>
-        <a:srgbClr val="9BBB59"/>
+        <a:srgbClr val="A5A5A5"/>
       </a:accent3>
       <a:accent4>
-        <a:srgbClr val="8064A2"/>
+        <a:srgbClr val="FFC000"/>
       </a:accent4>
       <a:accent5>
-        <a:srgbClr val="4BACC6"/>
+        <a:srgbClr val="5B9BD5"/>
       </a:accent5>
       <a:accent6>
-        <a:srgbClr val="F79646"/>
+        <a:srgbClr val="70AD47"/>
       </a:accent6>
       <a:hlink>
-        <a:srgbClr val="0000FF"/>
+        <a:srgbClr val="0563C1"/>
       </a:hlink>
       <a:folHlink>
-        <a:srgbClr val="800080"/>
+        <a:srgbClr val="954F72"/>
       </a:folHlink>
     </a:clrScheme>
     <a:fontScheme name="Office">
       <a:majorFont>
-        <a:latin typeface="Calibri"/>
+        <a:latin typeface="Calibri Light" panose="020F0302020204030204"/>
         <a:ea typeface=""/>
         <a:cs typeface=""/>
-        <a:font script="Jpan" typeface="ＭＳ Ｐゴシック"/>
+        <a:font script="Jpan" typeface="游ゴシック Light"/>
         <a:font script="Hang" typeface="맑은 고딕"/>
-        <a:font script="Hans" typeface="宋体"/>
+        <a:font script="Hans" typeface="等线 Light"/>
         <a:font script="Hant" typeface="新細明體"/>
         <a:font script="Arab" typeface="Times New Roman"/>
         <a:font script="Hebr" typeface="Times New Roman"/>
@@ -7818,14 +7714,31 @@
         <a:font script="Viet" typeface="Times New Roman"/>
         <a:font script="Uigh" typeface="Microsoft Uighur"/>
         <a:font script="Geor" typeface="Sylfaen"/>
+        <a:font script="Armn" typeface="Arial"/>
+        <a:font script="Bugi" typeface="Leelawadee UI"/>
+        <a:font script="Bopo" typeface="Microsoft JhengHei"/>
+        <a:font script="Java" typeface="Javanese Text"/>
+        <a:font script="Lisu" typeface="Segoe UI"/>
+        <a:font script="Mymr" typeface="Myanmar Text"/>
+        <a:font script="Nkoo" typeface="Ebrima"/>
+        <a:font script="Olck" typeface="Nirmala UI"/>
+        <a:font script="Osma" typeface="Ebrima"/>
+        <a:font script="Phag" typeface="Phagspa"/>
+        <a:font script="Syrn" typeface="Estrangelo Edessa"/>
+        <a:font script="Syrj" typeface="Estrangelo Edessa"/>
+        <a:font script="Syre" typeface="Estrangelo Edessa"/>
+        <a:font script="Sora" typeface="Nirmala UI"/>
+        <a:font script="Tale" typeface="Microsoft Tai Le"/>
+        <a:font script="Talu" typeface="Microsoft New Tai Lue"/>
+        <a:font script="Tfng" typeface="Ebrima"/>
       </a:majorFont>
       <a:minorFont>
-        <a:latin typeface="Calibri"/>
+        <a:latin typeface="Calibri" panose="020F0502020204030204"/>
         <a:ea typeface=""/>
         <a:cs typeface=""/>
-        <a:font script="Jpan" typeface="ＭＳ Ｐゴシック"/>
+        <a:font script="Jpan" typeface="游ゴシック"/>
         <a:font script="Hang" typeface="맑은 고딕"/>
-        <a:font script="Hans" typeface="宋体"/>
+        <a:font script="Hans" typeface="等线"/>
         <a:font script="Hant" typeface="新細明體"/>
         <a:font script="Arab" typeface="Arial"/>
         <a:font script="Hebr" typeface="Arial"/>
@@ -7853,6 +7766,23 @@
         <a:font script="Viet" typeface="Arial"/>
         <a:font script="Uigh" typeface="Microsoft Uighur"/>
         <a:font script="Geor" typeface="Sylfaen"/>
+        <a:font script="Armn" typeface="Arial"/>
+        <a:font script="Bugi" typeface="Leelawadee UI"/>
+        <a:font script="Bopo" typeface="Microsoft JhengHei"/>
+        <a:font script="Java" typeface="Javanese Text"/>
+        <a:font script="Lisu" typeface="Segoe UI"/>
+        <a:font script="Mymr" typeface="Myanmar Text"/>
+        <a:font script="Nkoo" typeface="Ebrima"/>
+        <a:font script="Olck" typeface="Nirmala UI"/>
+        <a:font script="Osma" typeface="Ebrima"/>
+        <a:font script="Phag" typeface="Phagspa"/>
+        <a:font script="Syrn" typeface="Estrangelo Edessa"/>
+        <a:font script="Syrj" typeface="Estrangelo Edessa"/>
+        <a:font script="Syre" typeface="Estrangelo Edessa"/>
+        <a:font script="Sora" typeface="Nirmala UI"/>
+        <a:font script="Tale" typeface="Microsoft Tai Le"/>
+        <a:font script="Talu" typeface="Microsoft New Tai Lue"/>
+        <a:font script="Tfng" typeface="Ebrima"/>
       </a:minorFont>
     </a:fontScheme>
     <a:fmtScheme name="Office">
@@ -7864,200 +7794,141 @@
           <a:gsLst>
             <a:gs pos="0">
               <a:schemeClr val="phClr">
-                <a:tint val="50000"/>
-                <a:satMod val="300000"/>
+                <a:lumMod val="110000"/>
+                <a:satMod val="105000"/>
+                <a:tint val="67000"/>
               </a:schemeClr>
             </a:gs>
-            <a:gs pos="35000">
+            <a:gs pos="50000">
               <a:schemeClr val="phClr">
-                <a:tint val="37000"/>
-                <a:satMod val="300000"/>
+                <a:lumMod val="105000"/>
+                <a:satMod val="103000"/>
+                <a:tint val="73000"/>
               </a:schemeClr>
             </a:gs>
             <a:gs pos="100000">
               <a:schemeClr val="phClr">
-                <a:tint val="15000"/>
-                <a:satMod val="350000"/>
+                <a:lumMod val="105000"/>
+                <a:satMod val="109000"/>
+                <a:tint val="81000"/>
               </a:schemeClr>
             </a:gs>
           </a:gsLst>
-          <a:lin ang="16200000" scaled="1"/>
+          <a:lin ang="5400000" scaled="0"/>
         </a:gradFill>
         <a:gradFill rotWithShape="1">
           <a:gsLst>
             <a:gs pos="0">
               <a:schemeClr val="phClr">
-                <a:tint val="100000"/>
+                <a:satMod val="103000"/>
+                <a:lumMod val="102000"/>
+                <a:tint val="94000"/>
+              </a:schemeClr>
+            </a:gs>
+            <a:gs pos="50000">
+              <a:schemeClr val="phClr">
+                <a:satMod val="110000"/>
+                <a:lumMod val="100000"/>
                 <a:shade val="100000"/>
-                <a:satMod val="130000"/>
               </a:schemeClr>
             </a:gs>
             <a:gs pos="100000">
               <a:schemeClr val="phClr">
-                <a:tint val="50000"/>
-                <a:shade val="100000"/>
-                <a:satMod val="350000"/>
+                <a:lumMod val="99000"/>
+                <a:satMod val="120000"/>
+                <a:shade val="78000"/>
               </a:schemeClr>
             </a:gs>
           </a:gsLst>
-          <a:lin ang="16200000" scaled="0"/>
+          <a:lin ang="5400000" scaled="0"/>
         </a:gradFill>
       </a:fillStyleLst>
       <a:lnStyleLst>
-        <a:ln w="9525" cap="flat" cmpd="sng" algn="ctr">
-          <a:solidFill>
-            <a:schemeClr val="phClr">
-              <a:shade val="95000"/>
-              <a:satMod val="105000"/>
-            </a:schemeClr>
-          </a:solidFill>
-          <a:prstDash val="solid"/>
-        </a:ln>
-        <a:ln w="25400" cap="flat" cmpd="sng" algn="ctr">
+        <a:ln w="6350" cap="flat" cmpd="sng" algn="ctr">
           <a:solidFill>
             <a:schemeClr val="phClr"/>
           </a:solidFill>
           <a:prstDash val="solid"/>
+          <a:miter lim="800000"/>
         </a:ln>
-        <a:ln w="38100" cap="flat" cmpd="sng" algn="ctr">
+        <a:ln w="12700" cap="flat" cmpd="sng" algn="ctr">
           <a:solidFill>
             <a:schemeClr val="phClr"/>
           </a:solidFill>
           <a:prstDash val="solid"/>
+          <a:miter lim="800000"/>
+        </a:ln>
+        <a:ln w="19050" cap="flat" cmpd="sng" algn="ctr">
+          <a:solidFill>
+            <a:schemeClr val="phClr"/>
+          </a:solidFill>
+          <a:prstDash val="solid"/>
+          <a:miter lim="800000"/>
         </a:ln>
       </a:lnStyleLst>
       <a:effectStyleLst>
         <a:effectStyle>
+          <a:effectLst/>
+        </a:effectStyle>
+        <a:effectStyle>
+          <a:effectLst/>
+        </a:effectStyle>
+        <a:effectStyle>
           <a:effectLst>
-            <a:outerShdw blurRad="40000" dist="20000" dir="5400000" rotWithShape="0">
+            <a:outerShdw blurRad="57150" dist="19050" dir="5400000" algn="ctr" rotWithShape="0">
               <a:srgbClr val="000000">
-                <a:alpha val="38000"/>
+                <a:alpha val="63000"/>
               </a:srgbClr>
             </a:outerShdw>
           </a:effectLst>
-        </a:effectStyle>
-        <a:effectStyle>
-          <a:effectLst>
-            <a:outerShdw blurRad="40000" dist="23000" dir="5400000" rotWithShape="0">
-              <a:srgbClr val="000000">
-                <a:alpha val="35000"/>
-              </a:srgbClr>
-            </a:outerShdw>
-          </a:effectLst>
-        </a:effectStyle>
-        <a:effectStyle>
-          <a:effectLst>
-            <a:outerShdw blurRad="40000" dist="23000" dir="5400000" rotWithShape="0">
-              <a:srgbClr val="000000">
-                <a:alpha val="35000"/>
-              </a:srgbClr>
-            </a:outerShdw>
-          </a:effectLst>
-          <a:scene3d>
-            <a:camera prst="orthographicFront">
-              <a:rot lat="0" lon="0" rev="0"/>
-            </a:camera>
-            <a:lightRig rig="threePt" dir="t">
-              <a:rot lat="0" lon="0" rev="1200000"/>
-            </a:lightRig>
-          </a:scene3d>
-          <a:sp3d>
-            <a:bevelT w="63500" h="25400"/>
-          </a:sp3d>
         </a:effectStyle>
       </a:effectStyleLst>
       <a:bgFillStyleLst>
         <a:solidFill>
           <a:schemeClr val="phClr"/>
         </a:solidFill>
+        <a:solidFill>
+          <a:schemeClr val="phClr">
+            <a:tint val="95000"/>
+            <a:satMod val="170000"/>
+          </a:schemeClr>
+        </a:solidFill>
         <a:gradFill rotWithShape="1">
           <a:gsLst>
             <a:gs pos="0">
               <a:schemeClr val="phClr">
-                <a:tint val="40000"/>
-                <a:satMod val="350000"/>
+                <a:tint val="93000"/>
+                <a:satMod val="150000"/>
+                <a:shade val="98000"/>
+                <a:lumMod val="102000"/>
               </a:schemeClr>
             </a:gs>
-            <a:gs pos="40000">
+            <a:gs pos="50000">
               <a:schemeClr val="phClr">
-                <a:tint val="45000"/>
-                <a:shade val="99000"/>
-                <a:satMod val="350000"/>
+                <a:tint val="98000"/>
+                <a:satMod val="130000"/>
+                <a:shade val="90000"/>
+                <a:lumMod val="103000"/>
               </a:schemeClr>
             </a:gs>
             <a:gs pos="100000">
               <a:schemeClr val="phClr">
-                <a:shade val="20000"/>
-                <a:satMod val="255000"/>
+                <a:shade val="63000"/>
+                <a:satMod val="120000"/>
               </a:schemeClr>
             </a:gs>
           </a:gsLst>
-          <a:path path="circle">
-            <a:fillToRect l="50000" t="-80000" r="50000" b="180000"/>
-          </a:path>
-        </a:gradFill>
-        <a:gradFill rotWithShape="1">
-          <a:gsLst>
-            <a:gs pos="0">
-              <a:schemeClr val="phClr">
-                <a:tint val="80000"/>
-                <a:satMod val="300000"/>
-              </a:schemeClr>
-            </a:gs>
-            <a:gs pos="100000">
-              <a:schemeClr val="phClr">
-                <a:shade val="30000"/>
-                <a:satMod val="200000"/>
-              </a:schemeClr>
-            </a:gs>
-          </a:gsLst>
-          <a:path path="circle">
-            <a:fillToRect l="50000" t="50000" r="50000" b="50000"/>
-          </a:path>
+          <a:lin ang="5400000" scaled="0"/>
         </a:gradFill>
       </a:bgFillStyleLst>
     </a:fmtScheme>
   </a:themeElements>
-  <a:objectDefaults>
-    <a:spDef>
-      <a:spPr/>
-      <a:bodyPr/>
-      <a:lstStyle/>
-      <a:style>
-        <a:lnRef idx="1">
-          <a:schemeClr val="accent1"/>
-        </a:lnRef>
-        <a:fillRef idx="3">
-          <a:schemeClr val="accent1"/>
-        </a:fillRef>
-        <a:effectRef idx="2">
-          <a:schemeClr val="accent1"/>
-        </a:effectRef>
-        <a:fontRef idx="minor">
-          <a:schemeClr val="lt1"/>
-        </a:fontRef>
-      </a:style>
-    </a:spDef>
-    <a:lnDef>
-      <a:spPr/>
-      <a:bodyPr/>
-      <a:lstStyle/>
-      <a:style>
-        <a:lnRef idx="2">
-          <a:schemeClr val="accent1"/>
-        </a:lnRef>
-        <a:fillRef idx="0">
-          <a:schemeClr val="accent1"/>
-        </a:fillRef>
-        <a:effectRef idx="1">
-          <a:schemeClr val="accent1"/>
-        </a:effectRef>
-        <a:fontRef idx="minor">
-          <a:schemeClr val="tx1"/>
-        </a:fontRef>
-      </a:style>
-    </a:lnDef>
-  </a:objectDefaults>
+  <a:objectDefaults/>
   <a:extraClrSchemeLst/>
+  <a:extLst>
+    <a:ext uri="{05A4C25C-085E-4340-85A3-A5531E510DB2}">
+      <thm15:themeFamily xmlns:thm15="http://schemas.microsoft.com/office/thememl/2012/main" name="Office Theme" id="{62F939B6-93AF-4DB8-9C6B-D6C7DFDC589F}" vid="{4A3C46E8-61CC-4603-A589-7422A47A8E4A}"/>
+    </a:ext>
+  </a:extLst>
 </a:theme>
 </file>